--- a/presentation/RetainIQ_Presentation.pptx
+++ b/presentation/RetainIQ_Presentation.pptx
@@ -7564,7 +7564,7 @@
                 <a:ea typeface="Calibri" pitchFamily="34" charset="-122"/>
                 <a:cs typeface="Calibri" pitchFamily="34" charset="-120"/>
               </a:rPr>
-              <a:t>pytest (466 tests) · ruff · GitHub Actions CI · headless Chrome and pandoc for reports</a:t>
+              <a:t>pytest (467 tests) · ruff · GitHub Actions CI · headless Chrome and pandoc for reports</a:t>
             </a:r>
             <a:endParaRPr lang="en-US" sz="1150" dirty="0"/>
           </a:p>
@@ -15514,7 +15514,7 @@
                 <a:ea typeface="Calibri" pitchFamily="34" charset="-122"/>
                 <a:cs typeface="Calibri" pitchFamily="34" charset="-120"/>
               </a:rPr>
-              <a:t>466 automated tests</a:t>
+              <a:t>467 automated tests</a:t>
             </a:r>
             <a:endParaRPr lang="en-US" sz="1300" dirty="0"/>
           </a:p>

--- a/presentation/RetainIQ_Presentation.pptx
+++ b/presentation/RetainIQ_Presentation.pptx
@@ -597,7 +597,7 @@
           <a:p>
             <a:r>
               <a:rPr lang="en-US" dirty="0"/>
-              <a:t>Why it matters: at 4.5% monthly voluntary churn a business keeps 0.955^12 = 57% of customers after a year, so it loses about 42%. Around 30% of churn is involuntary (failed payments). Both are the published SMB-SaaS benchmarks the simulator is calibrated to, and the calibration is enforced in CI. The quadrant is the core idea. A churn score finds people likely to leave, which mixes Persuadables with Lost Causes and Sleeping Dogs. Only Persuadables are worth paying for. Sleeping Dogs are made worse by contact. In the simulated business they make up 59.1% of the model's top predicted-risk decile against 5.3% of the bottom decile (25.7% overall), which is why risk-ranked targeting loses money. The ineffectiveness of risk targeting is prior work (Ascarza, JMR 2018) and is not claimed as new. The objectives are the four questions the system answers.</a:t>
+              <a:t>Why it matters: at 4.5% monthly voluntary churn a business keeps 0.955^12 = 57% of customers after a year, so it loses about 42%. Around 30% of churn is involuntary (failed payments). Both are the published SMB-SaaS benchmarks the simulator is calibrated to, and the calibration is enforced in CI. The quadrant is the core idea. A churn score finds people likely to leave, which mixes Persuadables with Lost Causes and Sleeping Dogs. Only Persuadables are worth paying for. Sleeping Dogs are made worse by contact. In the simulated business they make up 59.1% of the model's top predicted-risk decile against 5.3% of the bottom decile (25.7% overall), which is why risk-ranked targeting loses money. That risk targeting fails, and can raise churn, is prior work (Ascarza, JMR 2018) and is not claimed as new. The objectives are the four questions the system answers.</a:t>
             </a:r>
             <a:endParaRPr lang="en-US" dirty="0"/>
           </a:p>
@@ -685,7 +685,7 @@
           <a:p>
             <a:r>
               <a:rPr lang="en-US" dirty="0"/>
-              <a:t>Pipeline: (1) a billing export or the simulator; (2) preflight refuses unsafe files, for example Stripe amounts in cents, which would overstate every revenue figure 100x; (3) every fact carries occurred_at and available_at, and features only see what was available at decision time; (4) models; (5) the money layer and policy; (6) outputs and the holdout ledger. Datasets (Table 1 of the paper): Hillstrom 64,000; Criteo-UPLIFT v2.1 13,979,592; Lenta 687,029; Telco 7,043 loaded, 7,032 after cleaning; GBSG2 686; SubSim configurable. The four public RCTs have real randomised treatment, which is what allows causal evaluation. SubSim exists because no public dataset contains individual ground-truth treatment effects. Sources: Hillstrom (2008); Diemert et al. (2018); scikit-uplift; IBM/Kaggle; Schumacher et al. (1994).</a:t>
+              <a:t>Pipeline: (1) a billing export or the simulator; (2) preflight refuses unsafe files, for example Stripe amounts in cents, which would overstate every revenue figure 100x; (3) every fact carries occurred_at and available_at, and features only see what was available at decision time; (4) models; (5) the money layer and policy; (6) outputs and the holdout ledger. Datasets (Table 1 of the paper): Hillstrom 64,000; Criteo-UPLIFT v2.1 13,979,592; Lenta 687,029; Telco 7,043 loaded, 7,032 after cleaning; GBSG2 686; SubSim configurable. The three public RCTs have real randomised treatment, which is what allows causal evaluation; Hillstrom's two e-mail arms give four settings. SubSim exists because no public dataset contains individual ground-truth treatment effects. Sources: Hillstrom (2008); Diemert et al. (2018); scikit-uplift; IBM/Kaggle; Schumacher et al. (1994).</a:t>
             </a:r>
             <a:endParaRPr lang="en-US" dirty="0"/>
           </a:p>
@@ -949,7 +949,7 @@
           <a:p>
             <a:r>
               <a:rPr lang="en-US" dirty="0"/>
-              <a:t>Left, from make killtest: with the same 20% budget, targeting by churn score loses 22,823, worse than random (-17,035); treating everyone loses 89,869 (bar truncated). The oracle rows use true effects and are upper bounds. Right, paper Table 4: across four real randomised trials and the simulator, the gain from uplift modelling rises as corr(tau, propensity) falls. When the two rankings agree, the simpler outcome model wins because it estimates an easier quantity; the order among the four positive-correlation settings is within noise. Bottom: at n = 500 on the real Hillstrom experiment the best uplift method beats random on 75% of draws, which is why win rate is reported instead of the mean. The abstention rule beats ranking on 93% of draws but does not beat doing nothing, because the break-even effect is four times the delivered effect. The per-customer optimiser wins 58% of draws, CI [0.42, 0.72], which is chance. The holdout estimator is unbiased (88–98% interval coverage), but detecting the delivered lift of 0.0108 at 80% power needs about 119,500 customers with a 10% holdout (make holdout).</a:t>
+              <a:t>Left, from make killtest: with the same 20% budget, targeting by churn score loses 22,823, worse than random (-17,035); treating everyone loses 89,869 (bar truncated). The oracle rows use true effects and are upper bounds. Right, paper Table 4: the risk-lift correlation, which Ascarza (2018, Web Appendix A3.4) varied in a simulation, measured here from fitted models on four settings from three public randomised experiments. Where the two rankings agree, the simpler outcome model does as well or better because it estimates an easier quantity; the order among those four settings is within noise. The SubSim row is not like-for-like: it uses true effects and an oracle policy, on a simulator configured to have a negative correlation, so it is a ceiling. Bottom: at n = 500 on the real Hillstrom experiment the best uplift method beats random on 75% of draws, which is why win rate is reported instead of the mean. The abstention rule beats ranking on 93% of draws but does not beat doing nothing, because the break-even effect is four times the delivered effect. The per-customer optimiser wins 58% of draws, CI [0.42, 0.72], which is chance. The holdout estimator is unbiased (88–98% interval coverage), but detecting the delivered lift of 0.0108 at 80% power needs about 119,500 customers with a 10% holdout (make holdout).</a:t>
             </a:r>
             <a:endParaRPr lang="en-US" dirty="0"/>
           </a:p>
@@ -1125,7 +1125,7 @@
           <a:p>
             <a:r>
               <a:rPr lang="en-US" dirty="0"/>
-              <a:t>Takeaways: prediction quality and decision quality are different things; corr(tau, propensity) tells you in advance whether modelling the effect is worth its extra variance; and at small-business scale, reliability and measurability are the binding limits. Readiness is stated precisely because the evidence differs by component. Ready: the delivery path from a billing export to a report, the dashboard, and the engineering around them (tests on three Python versions, four CI gates, archived releases). Validated only on simulation and public RCTs: the survival model, the causal model with abstention and the offer ladder. Not yet demonstrated: a real client ROI figure, a policy that beats doing nothing, and an optimiser that beats one well-chosen offer. The next steps follow directly: a paying client, a live pilot with a permanent holdout, and pooling evidence across businesses because no single small business can measure the effect alone.</a:t>
+              <a:t>Takeaways: prediction quality and decision quality are different things; modelling the effect is not always worth its extra variance, because where risk and responsiveness line up a plain model does as well (the correlation is Ascarza's, 2018; the measurement on public experiments is ours); and at small-business scale, reliability and measurability are the binding limits. Readiness is stated precisely because the evidence differs by component. Ready: the delivery path from a billing export to a report, the dashboard, and the engineering around them (tests on three Python versions, four CI gates, archived releases). Validated only on simulation and public RCTs: the survival model, the causal model with abstention and the offer ladder. Not yet demonstrated: a real client ROI figure, a policy that beats doing nothing, and an optimiser that beats one well-chosen offer. The next steps follow directly: a paying client, a live pilot with a permanent holdout, and pooling evidence across businesses because no single small business can measure the effect alone.</a:t>
             </a:r>
             <a:endParaRPr lang="en-US" dirty="0"/>
           </a:p>
@@ -2625,7 +2625,7 @@
                 <a:ea typeface="Calibri" pitchFamily="34" charset="-122"/>
                 <a:cs typeface="Calibri" pitchFamily="34" charset="-120"/>
               </a:rPr>
-              <a:t>Risk is not responsiveness. Some customers leave because they were contacted: the offer reminds a dormant payer to cancel (Ascarza, 2018).</a:t>
+              <a:t>Risk is not responsiveness. In field experiments, contact has raised churn (Ascarza et al., 2016; Ascarza, 2018): an offer can remind a dormant payer to cancel.</a:t>
             </a:r>
             <a:endParaRPr lang="en-US" sz="1500" dirty="0"/>
           </a:p>
@@ -7564,7 +7564,7 @@
                 <a:ea typeface="Calibri" pitchFamily="34" charset="-122"/>
                 <a:cs typeface="Calibri" pitchFamily="34" charset="-120"/>
               </a:rPr>
-              <a:t>pytest (467 tests) · ruff · GitHub Actions CI · headless Chrome and pandoc for reports</a:t>
+              <a:t>pytest (487 tests) · ruff · GitHub Actions CI · headless Chrome and pandoc for reports</a:t>
             </a:r>
             <a:endParaRPr lang="en-US" sz="1150" dirty="0"/>
           </a:p>
@@ -12900,7 +12900,7 @@
                 <a:ea typeface="Calibri" pitchFamily="34" charset="-122"/>
                 <a:cs typeface="Calibri" pitchFamily="34" charset="-120"/>
               </a:rPr>
-              <a:t>τ = estimated offer effect, π = estimated churn risk</a:t>
+              <a:t>τ = offer effect, π = outcome propensity  ·  correlation after Ascarza (2018)</a:t>
             </a:r>
             <a:endParaRPr lang="en-US" sz="1300" dirty="0"/>
           </a:p>
@@ -13973,7 +13973,7 @@
                         <a:buNone/>
                       </a:pPr>
                       <a:r>
-                        <a:rPr lang="en-US" sz="1150" b="1" dirty="0">
+                        <a:rPr lang="en-US" sz="1150" i="1" dirty="0">
                           <a:solidFill>
                             <a:srgbClr val="1B2733"/>
                           </a:solidFill>
@@ -13981,7 +13981,7 @@
                           <a:ea typeface="Calibri" pitchFamily="34" charset="-122"/>
                           <a:cs typeface="Calibri" pitchFamily="34" charset="-120"/>
                         </a:rPr>
-                        <a:t>SubSim · subscription churn</a:t>
+                        <a:t>SubSim · simulator, oracle*</a:t>
                       </a:r>
                       <a:endParaRPr lang="en-US" sz="1150" dirty="0">
                         <a:latin typeface="Calibri" charset="0"/>
@@ -14041,7 +14041,7 @@
                         <a:buNone/>
                       </a:pPr>
                       <a:r>
-                        <a:rPr lang="en-US" sz="1150" b="1" dirty="0">
+                        <a:rPr lang="en-US" sz="1150" i="1" dirty="0">
                           <a:solidFill>
                             <a:srgbClr val="1B2733"/>
                           </a:solidFill>
@@ -14109,15 +14109,15 @@
                         <a:buNone/>
                       </a:pPr>
                       <a:r>
-                        <a:rPr lang="en-US" sz="1150" b="1" dirty="0">
+                        <a:rPr lang="en-US" sz="1150" i="1" dirty="0">
                           <a:solidFill>
-                            <a:srgbClr val="0B7A6B"/>
+                            <a:srgbClr val="5F6F80"/>
                           </a:solidFill>
                           <a:latin typeface="Calibri" pitchFamily="34" charset="0"/>
                           <a:ea typeface="Calibri" pitchFamily="34" charset="-122"/>
                           <a:cs typeface="Calibri" pitchFamily="34" charset="-120"/>
                         </a:rPr>
-                        <a:t>+106.9%</a:t>
+                        <a:t>+106.9%*</a:t>
                       </a:r>
                       <a:endParaRPr lang="en-US" sz="1150" dirty="0">
                         <a:latin typeface="Calibri" charset="0"/>
@@ -14181,8 +14181,8 @@
         </p:nvSpPr>
         <p:spPr>
           <a:xfrm>
-            <a:off x="6903720" y="4114800"/>
-            <a:ext cx="4754880" cy="731520"/>
+            <a:off x="6903720" y="4069080"/>
+            <a:ext cx="4754880" cy="868680"/>
           </a:xfrm>
           <a:prstGeom prst="rect">
             <a:avLst/>
@@ -14198,7 +14198,7 @@
               <a:buNone/>
             </a:pPr>
             <a:r>
-              <a:rPr lang="en-US" sz="1100" dirty="0">
+              <a:rPr lang="en-US" sz="1050" dirty="0">
                 <a:solidFill>
                   <a:srgbClr val="5F6F80"/>
                 </a:solidFill>
@@ -14206,9 +14206,9 @@
                 <a:ea typeface="Calibri" pitchFamily="34" charset="-122"/>
                 <a:cs typeface="Calibri" pitchFamily="34" charset="-120"/>
               </a:rPr>
-              <a:t>The lower the correlation between effect and risk, the more causal targeting is worth; retention is the adversarial case. Lenta's position was predicted before its data was obtained.</a:t>
-            </a:r>
-            <a:endParaRPr lang="en-US" sz="1100" dirty="0"/>
+              <a:t>Rows 1–4: fitted models on public experiments; their order is within noise. Lenta's position was predicted before its data was obtained. * The simulator's negative correlation is configured and the row uses true effects: a ceiling, not a like-for-like result.</a:t>
+            </a:r>
+            <a:endParaRPr lang="en-US" sz="1050" dirty="0"/>
           </a:p>
         </p:txBody>
       </p:sp>
@@ -15514,7 +15514,7 @@
                 <a:ea typeface="Calibri" pitchFamily="34" charset="-122"/>
                 <a:cs typeface="Calibri" pitchFamily="34" charset="-120"/>
               </a:rPr>
-              <a:t>467 automated tests</a:t>
+              <a:t>487 automated tests</a:t>
             </a:r>
             <a:endParaRPr lang="en-US" sz="1300" dirty="0"/>
           </a:p>
@@ -16300,7 +16300,7 @@
                 <a:ea typeface="Calibri" pitchFamily="34" charset="-122"/>
                 <a:cs typeface="Calibri" pitchFamily="34" charset="-120"/>
               </a:rPr>
-              <a:t>One measurable number, corr(τ, π), predicts whether causal targeting pays, confirmed on four real trials.</a:t>
+              <a:t>Causal targeting does not always pay: where risk and responsiveness line up, a plain model did as well on public experiments, and at n = 500 the best method beats random on 75% of draws.</a:t>
             </a:r>
             <a:endParaRPr lang="en-US" sz="1250" dirty="0"/>
           </a:p>
@@ -16856,7 +16856,7 @@
                 <a:ea typeface="Calibri" pitchFamily="34" charset="-122"/>
                 <a:cs typeface="Calibri" pitchFamily="34" charset="-120"/>
               </a:rPr>
-              <a:t>Derive corr(τ, π) analytically, not only measure it</a:t>
+              <a:t>Add Lemmens &amp; Gupta (2020) as a baseline; re-measure the correlation with intervals</a:t>
             </a:r>
             <a:endParaRPr lang="en-US" sz="1250" dirty="0"/>
           </a:p>
@@ -17124,7 +17124,7 @@
                 <a:ea typeface="Calibri" pitchFamily="34" charset="-122"/>
                 <a:cs typeface="Calibri" pitchFamily="34" charset="-120"/>
               </a:rPr>
-              <a:t>Ascarza (2018) Retention futility, J. Marketing Research  ·  Künzel et al. (2019) Metalearners, PNAS</a:t>
+              <a:t>Ascarza (2018), JMR  ·  Ascarza, Iyengar &amp; Schleicher (2016), JMR  ·  Lemmens &amp; Gupta (2020), Marketing Science</a:t>
             </a:r>
             <a:endParaRPr lang="en-US" sz="950" dirty="0"/>
           </a:p>
@@ -17144,7 +17144,7 @@
                 <a:ea typeface="Calibri" pitchFamily="34" charset="-122"/>
                 <a:cs typeface="Calibri" pitchFamily="34" charset="-120"/>
               </a:rPr>
-              <a:t>Cox (1972)  ·  Ishwaran et al. (2008) Random survival forests  ·  Katzman et al. (2018) DeepSurv</a:t>
+              <a:t>Devriendt et al. (2021), Information Sciences  ·  Künzel et al. (2019), PNAS  ·  Kaufman et al. (2012) Leakage</a:t>
             </a:r>
             <a:endParaRPr lang="en-US" sz="950" dirty="0"/>
           </a:p>
@@ -17164,7 +17164,7 @@
                 <a:ea typeface="Calibri" pitchFamily="34" charset="-122"/>
                 <a:cs typeface="Calibri" pitchFamily="34" charset="-120"/>
               </a:rPr>
-              <a:t>Kaufman et al. (2012) Leakage in data mining  ·  Gelman et al. (2013) Bayesian Data Analysis</a:t>
+              <a:t>Cox (1972)  ·  Ishwaran et al. (2008) RSF  ·  Katzman et al. (2018) DeepSurv  ·  Gelman et al. (2013) BDA</a:t>
             </a:r>
             <a:endParaRPr lang="en-US" sz="950" dirty="0"/>
           </a:p>

--- a/presentation/RetainIQ_Presentation.pptx
+++ b/presentation/RetainIQ_Presentation.pptx
@@ -7564,7 +7564,7 @@
                 <a:ea typeface="Calibri" pitchFamily="34" charset="-122"/>
                 <a:cs typeface="Calibri" pitchFamily="34" charset="-120"/>
               </a:rPr>
-              <a:t>pytest (487 tests) · ruff · GitHub Actions CI · headless Chrome and pandoc for reports</a:t>
+              <a:t>pytest (558 tests) · ruff · GitHub Actions CI · headless Chrome and pandoc for reports</a:t>
             </a:r>
             <a:endParaRPr lang="en-US" sz="1150" dirty="0"/>
           </a:p>
@@ -15514,7 +15514,7 @@
                 <a:ea typeface="Calibri" pitchFamily="34" charset="-122"/>
                 <a:cs typeface="Calibri" pitchFamily="34" charset="-120"/>
               </a:rPr>
-              <a:t>487 automated tests</a:t>
+              <a:t>558 automated tests</a:t>
             </a:r>
             <a:endParaRPr lang="en-US" sz="1300" dirty="0"/>
           </a:p>

--- a/presentation/RetainIQ_Presentation.pptx
+++ b/presentation/RetainIQ_Presentation.pptx
@@ -949,7 +949,7 @@
           <a:p>
             <a:r>
               <a:rPr lang="en-US" dirty="0"/>
-              <a:t>Left, from make killtest: with the same 20% budget, targeting by churn score loses 22,823, worse than random (-17,035); treating everyone loses 89,869 (bar truncated). The oracle rows use true effects and are upper bounds. Right, paper Table 4: the risk-lift correlation, which Ascarza (2018, Web Appendix A3.4) varied in a simulation, measured here from fitted models on four settings from three public randomised experiments. Where the two rankings agree, the simpler outcome model does as well or better because it estimates an easier quantity; the order among those four settings is within noise. The SubSim row is not like-for-like: it uses true effects and an oracle policy, on a simulator configured to have a negative correlation, so it is a ceiling. Bottom: at n = 500 on the real Hillstrom experiment the best uplift method beats random on 75% of draws, which is why win rate is reported instead of the mean. The abstention rule beats ranking on 93% of draws but does not beat doing nothing, because the break-even effect is four times the delivered effect. The per-customer optimiser wins 58% of draws, CI [0.42, 0.72], which is chance. The holdout estimator is unbiased (88–98% interval coverage), but detecting the delivered lift of 0.0108 at 80% power needs about 119,500 customers with a 10% holdout (make holdout).</a:t>
+              <a:t>Left, from make killtest: with the same 20% budget, targeting by churn score loses 22,823, worse than random (-17,035); treating everyone loses 89,869 (bar truncated). The oracle rows use true effects and are upper bounds. Right, paper Table 4: the risk-lift correlation, which Ascarza (2018, Web Appendix A3.4) varied in a simulation, measured here from fitted models on four settings from three public randomised experiments. Where the two rankings agree, the simpler outcome model does as well or better because it estimates an easier quantity; the order among those four settings is within noise. The SubSim row is not like-for-like: it uses true effects and an oracle policy, on a simulator configured to have a negative correlation, so it is a ceiling. Bottom: at n = 500 on the real Hillstrom experiment the best of five methods beats random on 72.5% of 200 draws (exact 95% interval 66% to 79%; 84.5% at 1,000 and 95.5% at 2,000; the weakest method 62.5%), which is why win rate is reported instead of the mean. The abstention rule beats ranking on 93% of draws but does not beat doing nothing, because the break-even effect is four times the delivered effect. The per-customer optimiser wins 58% of draws, CI [0.42, 0.72], which is chance. The holdout estimator is unbiased (88–98% interval coverage), but detecting the delivered lift of 0.0108 at 80% power needs about 119,500 customers with a 10% holdout (make holdout).</a:t>
             </a:r>
             <a:endParaRPr lang="en-US" dirty="0"/>
           </a:p>
@@ -7564,7 +7564,7 @@
                 <a:ea typeface="Calibri" pitchFamily="34" charset="-122"/>
                 <a:cs typeface="Calibri" pitchFamily="34" charset="-120"/>
               </a:rPr>
-              <a:t>pytest (558 tests) · ruff · GitHub Actions CI · headless Chrome and pandoc for reports</a:t>
+              <a:t>pytest (590 tests) · ruff · GitHub Actions CI · headless Chrome and pandoc for reports</a:t>
             </a:r>
             <a:endParaRPr lang="en-US" sz="1150" dirty="0"/>
           </a:p>
@@ -14267,7 +14267,7 @@
                 <a:ea typeface="Cambria" pitchFamily="34" charset="-122"/>
                 <a:cs typeface="Cambria" pitchFamily="34" charset="-120"/>
               </a:rPr>
-              <a:t>75%</a:t>
+              <a:t>72.5%</a:t>
             </a:r>
             <a:endParaRPr lang="en-US" sz="2600" dirty="0"/>
           </a:p>
@@ -14306,7 +14306,7 @@
                 <a:ea typeface="Calibri" pitchFamily="34" charset="-122"/>
                 <a:cs typeface="Calibri" pitchFamily="34" charset="-120"/>
               </a:rPr>
-              <a:t>of draws where the best uplift method beats random targeting at n = 500 (real Hillstrom RCT)</a:t>
+              <a:t>of 200 draws where the best method beats random at n = 500 (real Hillstrom RCT; 95% interval 66–79%)</a:t>
             </a:r>
             <a:endParaRPr lang="en-US" sz="1050" dirty="0"/>
           </a:p>
@@ -15514,7 +15514,7 @@
                 <a:ea typeface="Calibri" pitchFamily="34" charset="-122"/>
                 <a:cs typeface="Calibri" pitchFamily="34" charset="-120"/>
               </a:rPr>
-              <a:t>558 automated tests</a:t>
+              <a:t>590 automated tests</a:t>
             </a:r>
             <a:endParaRPr lang="en-US" sz="1300" dirty="0"/>
           </a:p>
@@ -16300,7 +16300,7 @@
                 <a:ea typeface="Calibri" pitchFamily="34" charset="-122"/>
                 <a:cs typeface="Calibri" pitchFamily="34" charset="-120"/>
               </a:rPr>
-              <a:t>Causal targeting does not always pay: where risk and responsiveness line up, a plain model did as well on public experiments, and at n = 500 the best method beats random on 75% of draws.</a:t>
+              <a:t>Causal targeting does not always pay: where risk and responsiveness line up, a plain model did as well on public experiments, and at n = 500 the best method beats random on 72.5% of draws.</a:t>
             </a:r>
             <a:endParaRPr lang="en-US" sz="1250" dirty="0"/>
           </a:p>

--- a/presentation/RetainIQ_Presentation.pptx
+++ b/presentation/RetainIQ_Presentation.pptx
@@ -949,7 +949,7 @@
           <a:p>
             <a:r>
               <a:rPr lang="en-US" dirty="0"/>
-              <a:t>Left, from make killtest: with the same 20% budget, targeting by churn score loses 22,823, worse than random (-17,035); treating everyone loses 89,869 (bar truncated). The oracle rows use true effects and are upper bounds. Right, paper Table 4: the risk-lift correlation, which Ascarza (2018, Web Appendix A3.4) varied in a simulation, measured here from fitted models on four settings from three public randomised experiments. Where the two rankings agree, the simpler outcome model does as well or better because it estimates an easier quantity; the order among those four settings is within noise. The SubSim row is not like-for-like: it uses true effects and an oracle policy, on a simulator configured to have a negative correlation, so it is a ceiling. Bottom: at n = 500 on the real Hillstrom experiment the best of five methods beats random on 72.5% of 200 draws (exact 95% interval 66% to 79%; 84.5% at 1,000 and 95.5% at 2,000; the weakest method 62.5%), which is why win rate is reported instead of the mean. The abstention rule beats ranking on 93% of draws but does not beat doing nothing, because the break-even effect is four times the delivered effect. The per-customer optimiser wins 58% of draws, CI [0.42, 0.72], which is chance. The holdout estimator is unbiased (88–98% interval coverage), but detecting the delivered lift of 0.0108 at 80% power needs about 119,500 customers with a 10% holdout (make holdout).</a:t>
+              <a:t>Left, from make killtest: with the same 20% budget, targeting by churn score loses 22,823, worse than random (-17,035); treating everyone loses 89,869 (bar truncated). The oracle rows use true effects and are upper bounds. Right, from make correlation-checks (D-074): the risk-lift correlation, which Ascarza (2018, Web Appendix A3.4) varied in a simulation, measured here from fitted models over thirty random splits of four settings from three public randomised experiments, and of a randomised trial of 60,000 simulated customers. Brackets are the 2.5th and 97.5th percentiles across splits. On the four real settings the uplift model's gain cannot be told from zero and the settings cannot be ordered. An earlier version of this table showed one split per row; the Hillstrom men's figure, +0.69, was the highest of the thirty. On the log-odds scale the real correlations are -0.46, +0.06, -0.22 and -0.05, so most of the positive correlation is the probability scale. In the simulated trial the uplift model wins on 30 of 30 splits; the simulator is configured to have a negative correlation. Bottom: at n = 500 on the real Hillstrom experiment the best of five methods beats random on 72.5% of 200 draws (exact 95% interval 66% to 79%; 84.5% at 1,000 and 95.5% at 2,000; the weakest method 62.5%), which is why win rate is reported instead of the mean. The abstention rule beats ranking on 93% of draws but does not beat doing nothing, because the break-even effect is four times the delivered effect. Against a re-implementation of Lemmens and Gupta's (2020) rule on 500 simulated pilots (make baseline, D-075) it is ahead on 78% of the draws that differ from 1,000 customers, on 26% at 250 and 47% at 500; it made money on 25 of the 139 draws on which it acted. The per-customer optimiser wins 58% of draws, CI [0.42, 0.72], which is chance. The holdout estimator is unbiased (88–98% interval coverage), but detecting the delivered lift of 0.0108 at 80% power needs about 119,500 customers with a 10% holdout (make holdout).</a:t>
             </a:r>
             <a:endParaRPr lang="en-US" dirty="0"/>
           </a:p>
@@ -1125,7 +1125,7 @@
           <a:p>
             <a:r>
               <a:rPr lang="en-US" dirty="0"/>
-              <a:t>Takeaways: prediction quality and decision quality are different things; modelling the effect is not always worth its extra variance, because where risk and responsiveness line up a plain model does as well (the correlation is Ascarza's, 2018; the measurement on public experiments is ours); and at small-business scale, reliability and measurability are the binding limits. Readiness is stated precisely because the evidence differs by component. Ready: the delivery path from a billing export to a report, the dashboard, and the engineering around them (tests on three Python versions, four CI gates, archived releases). Validated only on simulation and public RCTs: the survival model, the causal model with abstention and the offer ladder. Not yet demonstrated: a real client ROI figure, a policy that beats doing nothing, and an optimiser that beats one well-chosen offer. The next steps follow directly: a paying client, a live pilot with a permanent holdout, and pooling evidence across businesses because no single small business can measure the effect alone.</a:t>
+              <a:t>Takeaways: prediction quality and decision quality are different things; modelling the effect is not always worth its extra variance: on four public experiments, over thirty splits each, a plain model did as well (the correlation is Ascarza's, 2018; the measurement on public experiments is ours); and at small-business scale, reliability and measurability are the binding limits. Readiness is stated precisely because the evidence differs by component. Ready: the delivery path from a billing export to a report, the dashboard, and the engineering around them (tests on three Python versions, four CI gates, archived releases). Validated only on simulation and public RCTs: the survival model, the causal model with abstention and the offer ladder. Not yet demonstrated: a real client ROI figure, a policy that beats doing nothing, and an optimiser that beats one well-chosen offer. The next steps follow directly: a paying client, a live pilot with a permanent holdout, and pooling evidence across businesses because no single small business can measure the effect alone.</a:t>
             </a:r>
             <a:endParaRPr lang="en-US" dirty="0"/>
           </a:p>
@@ -7564,7 +7564,7 @@
                 <a:ea typeface="Calibri" pitchFamily="34" charset="-122"/>
                 <a:cs typeface="Calibri" pitchFamily="34" charset="-120"/>
               </a:rPr>
-              <a:t>pytest (590 tests) · ruff · GitHub Actions CI · headless Chrome and pandoc for reports</a:t>
+              <a:t>pytest (721 tests) · ruff · GitHub Actions CI · headless Chrome and pandoc for reports</a:t>
             </a:r>
             <a:endParaRPr lang="en-US" sz="1150" dirty="0"/>
           </a:p>
@@ -12929,9 +12929,9 @@
             <a:tbl>
               <a:tblPr/>
               <a:tblGrid>
-                <a:gridCol w="2103120"/>
-                <a:gridCol w="1097280"/>
-                <a:gridCol w="1554480"/>
+                <a:gridCol w="1737360"/>
+                <a:gridCol w="1508760"/>
+                <a:gridCol w="1508760"/>
               </a:tblGrid>
               <a:tr h="347472">
                 <a:tc>
@@ -12943,7 +12943,7 @@
                         <a:buNone/>
                       </a:pPr>
                       <a:r>
-                        <a:rPr lang="en-US" sz="1150" b="1" dirty="0">
+                        <a:rPr lang="en-US" sz="1000" b="1" dirty="0">
                           <a:solidFill>
                             <a:srgbClr val="FFFFFF"/>
                           </a:solidFill>
@@ -12953,14 +12953,14 @@
                         </a:rPr>
                         <a:t>Setting</a:t>
                       </a:r>
-                      <a:endParaRPr lang="en-US" sz="1150" dirty="0">
+                      <a:endParaRPr lang="en-US" sz="1000" dirty="0">
                         <a:latin typeface="Calibri" charset="0"/>
                         <a:ea typeface="Calibri" charset="0"/>
                         <a:cs typeface="Calibri" charset="0"/>
                       </a:endParaRPr>
                     </a:p>
                   </a:txBody>
-                  <a:tcPr marL="76200" marR="76200" marT="25400" marB="25400" anchor="ctr">
+                  <a:tcPr marL="50800" marR="50800" marT="25400" marB="25400" anchor="ctr">
                     <a:lnL w="6350" cap="flat" cmpd="sng" algn="ctr">
                       <a:solidFill>
                         <a:srgbClr val="D5DDE5"/>
@@ -13011,7 +13011,7 @@
                         <a:buNone/>
                       </a:pPr>
                       <a:r>
-                        <a:rPr lang="en-US" sz="1150" b="1" dirty="0">
+                        <a:rPr lang="en-US" sz="1000" b="1" dirty="0">
                           <a:solidFill>
                             <a:srgbClr val="FFFFFF"/>
                           </a:solidFill>
@@ -13021,14 +13021,14 @@
                         </a:rPr>
                         <a:t>corr(τ, π)</a:t>
                       </a:r>
-                      <a:endParaRPr lang="en-US" sz="1150" dirty="0">
+                      <a:endParaRPr lang="en-US" sz="1000" dirty="0">
                         <a:latin typeface="Calibri" charset="0"/>
                         <a:ea typeface="Calibri" charset="0"/>
                         <a:cs typeface="Calibri" charset="0"/>
                       </a:endParaRPr>
                     </a:p>
                   </a:txBody>
-                  <a:tcPr marL="76200" marR="76200" marT="25400" marB="25400" anchor="ctr">
+                  <a:tcPr marL="50800" marR="50800" marT="25400" marB="25400" anchor="ctr">
                     <a:lnL w="6350" cap="flat" cmpd="sng" algn="ctr">
                       <a:solidFill>
                         <a:srgbClr val="D5DDE5"/>
@@ -13079,7 +13079,7 @@
                         <a:buNone/>
                       </a:pPr>
                       <a:r>
-                        <a:rPr lang="en-US" sz="1150" b="1" dirty="0">
+                        <a:rPr lang="en-US" sz="1000" b="1" dirty="0">
                           <a:solidFill>
                             <a:srgbClr val="FFFFFF"/>
                           </a:solidFill>
@@ -13087,16 +13087,16 @@
                           <a:ea typeface="Calibri" pitchFamily="34" charset="-122"/>
                           <a:cs typeface="Calibri" pitchFamily="34" charset="-120"/>
                         </a:rPr>
-                        <a:t>Uplift advantage</a:t>
+                        <a:t>Uplift gain per 1,000</a:t>
                       </a:r>
-                      <a:endParaRPr lang="en-US" sz="1150" dirty="0">
+                      <a:endParaRPr lang="en-US" sz="1000" dirty="0">
                         <a:latin typeface="Calibri" charset="0"/>
                         <a:ea typeface="Calibri" charset="0"/>
                         <a:cs typeface="Calibri" charset="0"/>
                       </a:endParaRPr>
                     </a:p>
                   </a:txBody>
-                  <a:tcPr marL="76200" marR="76200" marT="25400" marB="25400" anchor="ctr">
+                  <a:tcPr marL="50800" marR="50800" marT="25400" marB="25400" anchor="ctr">
                     <a:lnL w="6350" cap="flat" cmpd="sng" algn="ctr">
                       <a:solidFill>
                         <a:srgbClr val="D5DDE5"/>
@@ -13149,7 +13149,7 @@
                         <a:buNone/>
                       </a:pPr>
                       <a:r>
-                        <a:rPr lang="en-US" sz="1150" dirty="0">
+                        <a:rPr lang="en-US" sz="1000" dirty="0">
                           <a:solidFill>
                             <a:srgbClr val="1B2733"/>
                           </a:solidFill>
@@ -13157,16 +13157,16 @@
                           <a:ea typeface="Calibri" pitchFamily="34" charset="-122"/>
                           <a:cs typeface="Calibri" pitchFamily="34" charset="-120"/>
                         </a:rPr>
-                        <a:t>Hillstrom · men's e-mail</a:t>
+                        <a:t>Criteo · advertising</a:t>
                       </a:r>
-                      <a:endParaRPr lang="en-US" sz="1150" dirty="0">
+                      <a:endParaRPr lang="en-US" sz="1000" dirty="0">
                         <a:latin typeface="Calibri" charset="0"/>
                         <a:ea typeface="Calibri" charset="0"/>
                         <a:cs typeface="Calibri" charset="0"/>
                       </a:endParaRPr>
                     </a:p>
                   </a:txBody>
-                  <a:tcPr marL="76200" marR="76200" marT="25400" marB="25400" anchor="ctr">
+                  <a:tcPr marL="50800" marR="50800" marT="25400" marB="25400" anchor="ctr">
                     <a:lnL w="6350" cap="flat" cmpd="sng" algn="ctr">
                       <a:solidFill>
                         <a:srgbClr val="D5DDE5"/>
@@ -13217,7 +13217,7 @@
                         <a:buNone/>
                       </a:pPr>
                       <a:r>
-                        <a:rPr lang="en-US" sz="1150" dirty="0">
+                        <a:rPr lang="en-US" sz="1000" dirty="0">
                           <a:solidFill>
                             <a:srgbClr val="1B2733"/>
                           </a:solidFill>
@@ -13225,16 +13225,16 @@
                           <a:ea typeface="Calibri" pitchFamily="34" charset="-122"/>
                           <a:cs typeface="Calibri" pitchFamily="34" charset="-120"/>
                         </a:rPr>
-                        <a:t>+0.69</a:t>
+                        <a:t>+0.58 [+0.51, +0.65]</a:t>
                       </a:r>
-                      <a:endParaRPr lang="en-US" sz="1150" dirty="0">
+                      <a:endParaRPr lang="en-US" sz="1000" dirty="0">
                         <a:latin typeface="Calibri" charset="0"/>
                         <a:ea typeface="Calibri" charset="0"/>
                         <a:cs typeface="Calibri" charset="0"/>
                       </a:endParaRPr>
                     </a:p>
                   </a:txBody>
-                  <a:tcPr marL="76200" marR="76200" marT="25400" marB="25400" anchor="ctr">
+                  <a:tcPr marL="50800" marR="50800" marT="25400" marB="25400" anchor="ctr">
                     <a:lnL w="6350" cap="flat" cmpd="sng" algn="ctr">
                       <a:solidFill>
                         <a:srgbClr val="D5DDE5"/>
@@ -13285,24 +13285,24 @@
                         <a:buNone/>
                       </a:pPr>
                       <a:r>
-                        <a:rPr lang="en-US" sz="1150" b="1" dirty="0">
+                        <a:rPr lang="en-US" sz="1000" dirty="0">
                           <a:solidFill>
-                            <a:srgbClr val="D9480F"/>
+                            <a:srgbClr val="1B2733"/>
                           </a:solidFill>
                           <a:latin typeface="Calibri" pitchFamily="34" charset="0"/>
                           <a:ea typeface="Calibri" pitchFamily="34" charset="-122"/>
                           <a:cs typeface="Calibri" pitchFamily="34" charset="-120"/>
                         </a:rPr>
-                        <a:t>−5.6%</a:t>
+                        <a:t>+0.1 [−0.1, +0.3]</a:t>
                       </a:r>
-                      <a:endParaRPr lang="en-US" sz="1150" dirty="0">
+                      <a:endParaRPr lang="en-US" sz="1000" dirty="0">
                         <a:latin typeface="Calibri" charset="0"/>
                         <a:ea typeface="Calibri" charset="0"/>
                         <a:cs typeface="Calibri" charset="0"/>
                       </a:endParaRPr>
                     </a:p>
                   </a:txBody>
-                  <a:tcPr marL="76200" marR="76200" marT="25400" marB="25400" anchor="ctr">
+                  <a:tcPr marL="50800" marR="50800" marT="25400" marB="25400" anchor="ctr">
                     <a:lnL w="6350" cap="flat" cmpd="sng" algn="ctr">
                       <a:solidFill>
                         <a:srgbClr val="D5DDE5"/>
@@ -13355,7 +13355,7 @@
                         <a:buNone/>
                       </a:pPr>
                       <a:r>
-                        <a:rPr lang="en-US" sz="1150" dirty="0">
+                        <a:rPr lang="en-US" sz="1000" dirty="0">
                           <a:solidFill>
                             <a:srgbClr val="1B2733"/>
                           </a:solidFill>
@@ -13363,16 +13363,16 @@
                           <a:ea typeface="Calibri" pitchFamily="34" charset="-122"/>
                           <a:cs typeface="Calibri" pitchFamily="34" charset="-120"/>
                         </a:rPr>
-                        <a:t>Criteo · advertising</a:t>
+                        <a:t>Hillstrom · men's e-mail</a:t>
                       </a:r>
-                      <a:endParaRPr lang="en-US" sz="1150" dirty="0">
+                      <a:endParaRPr lang="en-US" sz="1000" dirty="0">
                         <a:latin typeface="Calibri" charset="0"/>
                         <a:ea typeface="Calibri" charset="0"/>
                         <a:cs typeface="Calibri" charset="0"/>
                       </a:endParaRPr>
                     </a:p>
                   </a:txBody>
-                  <a:tcPr marL="76200" marR="76200" marT="25400" marB="25400" anchor="ctr">
+                  <a:tcPr marL="50800" marR="50800" marT="25400" marB="25400" anchor="ctr">
                     <a:lnL w="6350" cap="flat" cmpd="sng" algn="ctr">
                       <a:solidFill>
                         <a:srgbClr val="D5DDE5"/>
@@ -13423,7 +13423,7 @@
                         <a:buNone/>
                       </a:pPr>
                       <a:r>
-                        <a:rPr lang="en-US" sz="1150" dirty="0">
+                        <a:rPr lang="en-US" sz="1000" dirty="0">
                           <a:solidFill>
                             <a:srgbClr val="1B2733"/>
                           </a:solidFill>
@@ -13431,16 +13431,16 @@
                           <a:ea typeface="Calibri" pitchFamily="34" charset="-122"/>
                           <a:cs typeface="Calibri" pitchFamily="34" charset="-120"/>
                         </a:rPr>
-                        <a:t>+0.58</a:t>
+                        <a:t>+0.28 [−0.21, +0.66]</a:t>
                       </a:r>
-                      <a:endParaRPr lang="en-US" sz="1150" dirty="0">
+                      <a:endParaRPr lang="en-US" sz="1000" dirty="0">
                         <a:latin typeface="Calibri" charset="0"/>
                         <a:ea typeface="Calibri" charset="0"/>
                         <a:cs typeface="Calibri" charset="0"/>
                       </a:endParaRPr>
                     </a:p>
                   </a:txBody>
-                  <a:tcPr marL="76200" marR="76200" marT="25400" marB="25400" anchor="ctr">
+                  <a:tcPr marL="50800" marR="50800" marT="25400" marB="25400" anchor="ctr">
                     <a:lnL w="6350" cap="flat" cmpd="sng" algn="ctr">
                       <a:solidFill>
                         <a:srgbClr val="D5DDE5"/>
@@ -13491,7 +13491,7 @@
                         <a:buNone/>
                       </a:pPr>
                       <a:r>
-                        <a:rPr lang="en-US" sz="1150" b="1" dirty="0">
+                        <a:rPr lang="en-US" sz="1000" dirty="0">
                           <a:solidFill>
                             <a:srgbClr val="1B2733"/>
                           </a:solidFill>
@@ -13499,16 +13499,16 @@
                           <a:ea typeface="Calibri" pitchFamily="34" charset="-122"/>
                           <a:cs typeface="Calibri" pitchFamily="34" charset="-120"/>
                         </a:rPr>
-                        <a:t>+0.6%</a:t>
+                        <a:t>−0.1 [−3.0, +2.8]</a:t>
                       </a:r>
-                      <a:endParaRPr lang="en-US" sz="1150" dirty="0">
+                      <a:endParaRPr lang="en-US" sz="1000" dirty="0">
                         <a:latin typeface="Calibri" charset="0"/>
                         <a:ea typeface="Calibri" charset="0"/>
                         <a:cs typeface="Calibri" charset="0"/>
                       </a:endParaRPr>
                     </a:p>
                   </a:txBody>
-                  <a:tcPr marL="76200" marR="76200" marT="25400" marB="25400" anchor="ctr">
+                  <a:tcPr marL="50800" marR="50800" marT="25400" marB="25400" anchor="ctr">
                     <a:lnL w="6350" cap="flat" cmpd="sng" algn="ctr">
                       <a:solidFill>
                         <a:srgbClr val="D5DDE5"/>
@@ -13561,7 +13561,7 @@
                         <a:buNone/>
                       </a:pPr>
                       <a:r>
-                        <a:rPr lang="en-US" sz="1150" dirty="0">
+                        <a:rPr lang="en-US" sz="1000" dirty="0">
                           <a:solidFill>
                             <a:srgbClr val="1B2733"/>
                           </a:solidFill>
@@ -13571,14 +13571,14 @@
                         </a:rPr>
                         <a:t>Hillstrom · women's e-mail</a:t>
                       </a:r>
-                      <a:endParaRPr lang="en-US" sz="1150" dirty="0">
+                      <a:endParaRPr lang="en-US" sz="1000" dirty="0">
                         <a:latin typeface="Calibri" charset="0"/>
                         <a:ea typeface="Calibri" charset="0"/>
                         <a:cs typeface="Calibri" charset="0"/>
                       </a:endParaRPr>
                     </a:p>
                   </a:txBody>
-                  <a:tcPr marL="76200" marR="76200" marT="25400" marB="25400" anchor="ctr">
+                  <a:tcPr marL="50800" marR="50800" marT="25400" marB="25400" anchor="ctr">
                     <a:lnL w="6350" cap="flat" cmpd="sng" algn="ctr">
                       <a:solidFill>
                         <a:srgbClr val="D5DDE5"/>
@@ -13629,7 +13629,7 @@
                         <a:buNone/>
                       </a:pPr>
                       <a:r>
-                        <a:rPr lang="en-US" sz="1150" dirty="0">
+                        <a:rPr lang="en-US" sz="1000" dirty="0">
                           <a:solidFill>
                             <a:srgbClr val="1B2733"/>
                           </a:solidFill>
@@ -13637,16 +13637,16 @@
                           <a:ea typeface="Calibri" pitchFamily="34" charset="-122"/>
                           <a:cs typeface="Calibri" pitchFamily="34" charset="-120"/>
                         </a:rPr>
-                        <a:t>+0.19</a:t>
+                        <a:t>+0.18 [−0.07, +0.49]</a:t>
                       </a:r>
-                      <a:endParaRPr lang="en-US" sz="1150" dirty="0">
+                      <a:endParaRPr lang="en-US" sz="1000" dirty="0">
                         <a:latin typeface="Calibri" charset="0"/>
                         <a:ea typeface="Calibri" charset="0"/>
                         <a:cs typeface="Calibri" charset="0"/>
                       </a:endParaRPr>
                     </a:p>
                   </a:txBody>
-                  <a:tcPr marL="76200" marR="76200" marT="25400" marB="25400" anchor="ctr">
+                  <a:tcPr marL="50800" marR="50800" marT="25400" marB="25400" anchor="ctr">
                     <a:lnL w="6350" cap="flat" cmpd="sng" algn="ctr">
                       <a:solidFill>
                         <a:srgbClr val="D5DDE5"/>
@@ -13697,7 +13697,7 @@
                         <a:buNone/>
                       </a:pPr>
                       <a:r>
-                        <a:rPr lang="en-US" sz="1150" b="1" dirty="0">
+                        <a:rPr lang="en-US" sz="1000" dirty="0">
                           <a:solidFill>
                             <a:srgbClr val="1B2733"/>
                           </a:solidFill>
@@ -13705,16 +13705,16 @@
                           <a:ea typeface="Calibri" pitchFamily="34" charset="-122"/>
                           <a:cs typeface="Calibri" pitchFamily="34" charset="-120"/>
                         </a:rPr>
-                        <a:t>+12.7%</a:t>
+                        <a:t>+2.6 [−1.9, +6.2]</a:t>
                       </a:r>
-                      <a:endParaRPr lang="en-US" sz="1150" dirty="0">
+                      <a:endParaRPr lang="en-US" sz="1000" dirty="0">
                         <a:latin typeface="Calibri" charset="0"/>
                         <a:ea typeface="Calibri" charset="0"/>
                         <a:cs typeface="Calibri" charset="0"/>
                       </a:endParaRPr>
                     </a:p>
                   </a:txBody>
-                  <a:tcPr marL="76200" marR="76200" marT="25400" marB="25400" anchor="ctr">
+                  <a:tcPr marL="50800" marR="50800" marT="25400" marB="25400" anchor="ctr">
                     <a:lnL w="6350" cap="flat" cmpd="sng" algn="ctr">
                       <a:solidFill>
                         <a:srgbClr val="D5DDE5"/>
@@ -13767,7 +13767,7 @@
                         <a:buNone/>
                       </a:pPr>
                       <a:r>
-                        <a:rPr lang="en-US" sz="1150" dirty="0">
+                        <a:rPr lang="en-US" sz="1000" dirty="0">
                           <a:solidFill>
                             <a:srgbClr val="1B2733"/>
                           </a:solidFill>
@@ -13777,14 +13777,14 @@
                         </a:rPr>
                         <a:t>Lenta · retail promotion</a:t>
                       </a:r>
-                      <a:endParaRPr lang="en-US" sz="1150" dirty="0">
+                      <a:endParaRPr lang="en-US" sz="1000" dirty="0">
                         <a:latin typeface="Calibri" charset="0"/>
                         <a:ea typeface="Calibri" charset="0"/>
                         <a:cs typeface="Calibri" charset="0"/>
                       </a:endParaRPr>
                     </a:p>
                   </a:txBody>
-                  <a:tcPr marL="76200" marR="76200" marT="25400" marB="25400" anchor="ctr">
+                  <a:tcPr marL="50800" marR="50800" marT="25400" marB="25400" anchor="ctr">
                     <a:lnL w="6350" cap="flat" cmpd="sng" algn="ctr">
                       <a:solidFill>
                         <a:srgbClr val="D5DDE5"/>
@@ -13835,7 +13835,7 @@
                         <a:buNone/>
                       </a:pPr>
                       <a:r>
-                        <a:rPr lang="en-US" sz="1150" dirty="0">
+                        <a:rPr lang="en-US" sz="1000" dirty="0">
                           <a:solidFill>
                             <a:srgbClr val="1B2733"/>
                           </a:solidFill>
@@ -13843,16 +13843,16 @@
                           <a:ea typeface="Calibri" pitchFamily="34" charset="-122"/>
                           <a:cs typeface="Calibri" pitchFamily="34" charset="-120"/>
                         </a:rPr>
-                        <a:t>+0.17</a:t>
+                        <a:t>+0.13 [+0.05, +0.22]</a:t>
                       </a:r>
-                      <a:endParaRPr lang="en-US" sz="1150" dirty="0">
+                      <a:endParaRPr lang="en-US" sz="1000" dirty="0">
                         <a:latin typeface="Calibri" charset="0"/>
                         <a:ea typeface="Calibri" charset="0"/>
                         <a:cs typeface="Calibri" charset="0"/>
                       </a:endParaRPr>
                     </a:p>
                   </a:txBody>
-                  <a:tcPr marL="76200" marR="76200" marT="25400" marB="25400" anchor="ctr">
+                  <a:tcPr marL="50800" marR="50800" marT="25400" marB="25400" anchor="ctr">
                     <a:lnL w="6350" cap="flat" cmpd="sng" algn="ctr">
                       <a:solidFill>
                         <a:srgbClr val="D5DDE5"/>
@@ -13903,7 +13903,7 @@
                         <a:buNone/>
                       </a:pPr>
                       <a:r>
-                        <a:rPr lang="en-US" sz="1150" b="1" dirty="0">
+                        <a:rPr lang="en-US" sz="1000" dirty="0">
                           <a:solidFill>
                             <a:srgbClr val="1B2733"/>
                           </a:solidFill>
@@ -13911,16 +13911,16 @@
                           <a:ea typeface="Calibri" pitchFamily="34" charset="-122"/>
                           <a:cs typeface="Calibri" pitchFamily="34" charset="-120"/>
                         </a:rPr>
-                        <a:t>+20.3%</a:t>
+                        <a:t>+0.6 [−0.1, +1.5]</a:t>
                       </a:r>
-                      <a:endParaRPr lang="en-US" sz="1150" dirty="0">
+                      <a:endParaRPr lang="en-US" sz="1000" dirty="0">
                         <a:latin typeface="Calibri" charset="0"/>
                         <a:ea typeface="Calibri" charset="0"/>
                         <a:cs typeface="Calibri" charset="0"/>
                       </a:endParaRPr>
                     </a:p>
                   </a:txBody>
-                  <a:tcPr marL="76200" marR="76200" marT="25400" marB="25400" anchor="ctr">
+                  <a:tcPr marL="50800" marR="50800" marT="25400" marB="25400" anchor="ctr">
                     <a:lnL w="6350" cap="flat" cmpd="sng" algn="ctr">
                       <a:solidFill>
                         <a:srgbClr val="D5DDE5"/>
@@ -13973,7 +13973,7 @@
                         <a:buNone/>
                       </a:pPr>
                       <a:r>
-                        <a:rPr lang="en-US" sz="1150" i="1" dirty="0">
+                        <a:rPr lang="en-US" sz="1000" i="1" dirty="0">
                           <a:solidFill>
                             <a:srgbClr val="1B2733"/>
                           </a:solidFill>
@@ -13981,16 +13981,16 @@
                           <a:ea typeface="Calibri" pitchFamily="34" charset="-122"/>
                           <a:cs typeface="Calibri" pitchFamily="34" charset="-120"/>
                         </a:rPr>
-                        <a:t>SubSim · simulator, oracle*</a:t>
+                        <a:t>SubSim · simulated trial*</a:t>
                       </a:r>
-                      <a:endParaRPr lang="en-US" sz="1150" dirty="0">
+                      <a:endParaRPr lang="en-US" sz="1000" dirty="0">
                         <a:latin typeface="Calibri" charset="0"/>
                         <a:ea typeface="Calibri" charset="0"/>
                         <a:cs typeface="Calibri" charset="0"/>
                       </a:endParaRPr>
                     </a:p>
                   </a:txBody>
-                  <a:tcPr marL="76200" marR="76200" marT="25400" marB="25400" anchor="ctr">
+                  <a:tcPr marL="50800" marR="50800" marT="25400" marB="25400" anchor="ctr">
                     <a:lnL w="6350" cap="flat" cmpd="sng" algn="ctr">
                       <a:solidFill>
                         <a:srgbClr val="D5DDE5"/>
@@ -14041,7 +14041,7 @@
                         <a:buNone/>
                       </a:pPr>
                       <a:r>
-                        <a:rPr lang="en-US" sz="1150" i="1" dirty="0">
+                        <a:rPr lang="en-US" sz="1000" i="1" dirty="0">
                           <a:solidFill>
                             <a:srgbClr val="1B2733"/>
                           </a:solidFill>
@@ -14049,16 +14049,16 @@
                           <a:ea typeface="Calibri" pitchFamily="34" charset="-122"/>
                           <a:cs typeface="Calibri" pitchFamily="34" charset="-120"/>
                         </a:rPr>
-                        <a:t>−0.19</a:t>
+                        <a:t>−0.21 [−0.33, −0.07]</a:t>
                       </a:r>
-                      <a:endParaRPr lang="en-US" sz="1150" dirty="0">
+                      <a:endParaRPr lang="en-US" sz="1000" dirty="0">
                         <a:latin typeface="Calibri" charset="0"/>
                         <a:ea typeface="Calibri" charset="0"/>
                         <a:cs typeface="Calibri" charset="0"/>
                       </a:endParaRPr>
                     </a:p>
                   </a:txBody>
-                  <a:tcPr marL="76200" marR="76200" marT="25400" marB="25400" anchor="ctr">
+                  <a:tcPr marL="50800" marR="50800" marT="25400" marB="25400" anchor="ctr">
                     <a:lnL w="6350" cap="flat" cmpd="sng" algn="ctr">
                       <a:solidFill>
                         <a:srgbClr val="D5DDE5"/>
@@ -14109,24 +14109,24 @@
                         <a:buNone/>
                       </a:pPr>
                       <a:r>
-                        <a:rPr lang="en-US" sz="1150" i="1" dirty="0">
+                        <a:rPr lang="en-US" sz="1000" b="1" i="1" dirty="0">
                           <a:solidFill>
-                            <a:srgbClr val="5F6F80"/>
+                            <a:srgbClr val="0B7A6B"/>
                           </a:solidFill>
                           <a:latin typeface="Calibri" pitchFamily="34" charset="0"/>
                           <a:ea typeface="Calibri" pitchFamily="34" charset="-122"/>
                           <a:cs typeface="Calibri" pitchFamily="34" charset="-120"/>
                         </a:rPr>
-                        <a:t>+106.9%*</a:t>
+                        <a:t>+9.7 [+5.0, +14.4]</a:t>
                       </a:r>
-                      <a:endParaRPr lang="en-US" sz="1150" dirty="0">
+                      <a:endParaRPr lang="en-US" sz="1000" dirty="0">
                         <a:latin typeface="Calibri" charset="0"/>
                         <a:ea typeface="Calibri" charset="0"/>
                         <a:cs typeface="Calibri" charset="0"/>
                       </a:endParaRPr>
                     </a:p>
                   </a:txBody>
-                  <a:tcPr marL="76200" marR="76200" marT="25400" marB="25400" anchor="ctr">
+                  <a:tcPr marL="50800" marR="50800" marT="25400" marB="25400" anchor="ctr">
                     <a:lnL w="6350" cap="flat" cmpd="sng" algn="ctr">
                       <a:solidFill>
                         <a:srgbClr val="D5DDE5"/>
@@ -14206,7 +14206,7 @@
                 <a:ea typeface="Calibri" pitchFamily="34" charset="-122"/>
                 <a:cs typeface="Calibri" pitchFamily="34" charset="-120"/>
               </a:rPr>
-              <a:t>Rows 1–4: fitted models on public experiments; their order is within noise. Lenta's position was predicted before its data was obtained. * The simulator's negative correlation is configured and the row uses true effects: a ceiling, not a like-for-like result.</a:t>
+              <a:t>Fitted models; mean of 30 splits [2.5th–97.5th percentile]. Rows 1–4 are public experiments: no gain is clear of zero and they cannot be ordered. On the log-odds scale their correlations are −0.46 to +0.06. * 60,000 simulated customers; the negative correlation is configured.</a:t>
             </a:r>
             <a:endParaRPr lang="en-US" sz="1050" dirty="0"/>
           </a:p>
@@ -14406,7 +14406,7 @@
                 <a:ea typeface="Calibri" pitchFamily="34" charset="-122"/>
                 <a:cs typeface="Calibri" pitchFamily="34" charset="-120"/>
               </a:rPr>
-              <a:t>of draws where abstaining beats risk ranking; it still does not beat doing nothing</a:t>
+              <a:t>of draws where abstaining beats risk ranking; ahead of Lemmens &amp; Gupta's rule only from n ≈ 1,000; never beats doing nothing</a:t>
             </a:r>
             <a:endParaRPr lang="en-US" sz="1050" dirty="0"/>
           </a:p>
@@ -15514,7 +15514,7 @@
                 <a:ea typeface="Calibri" pitchFamily="34" charset="-122"/>
                 <a:cs typeface="Calibri" pitchFamily="34" charset="-120"/>
               </a:rPr>
-              <a:t>590 automated tests</a:t>
+              <a:t>721 automated tests</a:t>
             </a:r>
             <a:endParaRPr lang="en-US" sz="1300" dirty="0"/>
           </a:p>
@@ -16300,7 +16300,7 @@
                 <a:ea typeface="Calibri" pitchFamily="34" charset="-122"/>
                 <a:cs typeface="Calibri" pitchFamily="34" charset="-120"/>
               </a:rPr>
-              <a:t>Causal targeting does not always pay: where risk and responsiveness line up, a plain model did as well on public experiments, and at n = 500 the best method beats random on 72.5% of draws.</a:t>
+              <a:t>Causal targeting does not always pay: on four public experiments a plain model did as well, and at n = 500 the best method beats random on 72.5% of draws.</a:t>
             </a:r>
             <a:endParaRPr lang="en-US" sz="1250" dirty="0"/>
           </a:p>
@@ -16856,7 +16856,7 @@
                 <a:ea typeface="Calibri" pitchFamily="34" charset="-122"/>
                 <a:cs typeface="Calibri" pitchFamily="34" charset="-120"/>
               </a:rPr>
-              <a:t>Add Lemmens &amp; Gupta (2020) as a baseline; re-measure the correlation with intervals</a:t>
+              <a:t>Explain why abstention loses on most of the draws where it acts (114 of 139)</a:t>
             </a:r>
             <a:endParaRPr lang="en-US" sz="1250" dirty="0"/>
           </a:p>

--- a/presentation/RetainIQ_Presentation.pptx
+++ b/presentation/RetainIQ_Presentation.pptx
@@ -949,7 +949,7 @@
           <a:p>
             <a:r>
               <a:rPr lang="en-US" dirty="0"/>
-              <a:t>Left, from make killtest: with the same 20% budget, targeting by churn score loses 22,823, worse than random (-17,035); treating everyone loses 89,869 (bar truncated). The oracle rows use true effects and are upper bounds. Right, from make correlation-checks (D-074): the risk-lift correlation, which Ascarza (2018, Web Appendix A3.4) varied in a simulation, measured here from fitted models over thirty random splits of four settings from three public randomised experiments, and of a randomised trial of 60,000 simulated customers. Brackets are the 2.5th and 97.5th percentiles across splits. On the four real settings the uplift model's gain cannot be told from zero and the settings cannot be ordered. An earlier version of this table showed one split per row; the Hillstrom men's figure, +0.69, was the highest of the thirty. On the log-odds scale the real correlations are -0.46, +0.06, -0.22 and -0.05, so most of the positive correlation is the probability scale. In the simulated trial the uplift model wins on 30 of 30 splits; the simulator is configured to have a negative correlation. Bottom: at n = 500 on the real Hillstrom experiment the best of five methods beats random on 72.5% of 200 draws (exact 95% interval 66% to 79%; 84.5% at 1,000 and 95.5% at 2,000; the weakest method 62.5%), which is why win rate is reported instead of the mean. The abstention rule beats ranking on 93% of draws but does not beat doing nothing, because the break-even effect is four times the delivered effect. Against a re-implementation of Lemmens and Gupta's (2020) rule on 500 simulated pilots (make baseline, D-075) it is ahead on 78% of the draws that differ from 1,000 customers, on 26% at 250 and 47% at 500; it made money on 25 of the 139 draws on which it acted. The per-customer optimiser wins 58% of draws, CI [0.42, 0.72], which is chance. The holdout estimator is unbiased (88–98% interval coverage), but detecting the delivered lift of 0.0108 at 80% power needs about 119,500 customers with a 10% holdout (make holdout).</a:t>
+              <a:t>Left, from make killtest: with the same 20% budget, targeting by churn score loses 22,823, worse than random (-17,035); treating everyone loses 89,869 (bar truncated). The oracle rows use true effects and are upper bounds. Right, from make correlation-checks (D-074): the risk-lift correlation, which Ascarza (2018, Web Appendix A3.4) varied in a simulation, measured here from fitted models over thirty random splits of four settings from three public randomised experiments, and of a randomised trial of 60,000 simulated customers. Brackets are the 2.5th and 97.5th percentiles across splits. On the four real settings the uplift model's gain cannot be told from zero and the settings cannot be ordered. An earlier version of this table showed one split per row; the Hillstrom men's figure, +0.69, was the highest of the thirty. On the log-odds scale the real correlations are -0.46, +0.06, -0.22 and -0.05, so most of the positive correlation is the probability scale. In the simulated trial the uplift model wins on 30 of 30 splits; the simulator is configured to have a negative correlation. The indep. column (D-076) fits the risk model on customers the effect model never saw: sharing customers inflates the figure by at most 0.05. The dagger: the library's classifier stops early by default above 10,000 rows and each Hillstrom arm has about 10,650, so the treated and control models stopped at different rounds (70 against 26 on the split that gave +0.69; fitted alike it gives +0.35). With early stopping off the means hardly move and the ranges tighten to +0.17 to +0.42 and +0.04 to +0.31. Results fitted on 10,000 rows or fewer are unaffected. Bottom: at n = 500 on the real Hillstrom experiment the best of five methods beats random on 72.5% of 200 draws (exact 95% interval 66% to 79%; 84.5% at 1,000 and 95.5% at 2,000; the weakest method 62.5%), which is why win rate is reported instead of the mean. The abstention rule beats ranking on 93% of draws but does not beat doing nothing, because the break-even effect is four times the delivered effect. Against a re-implementation of Lemmens and Gupta's (2020) rule on 500 simulated pilots (make baseline, D-075) it is ahead on 78% of the draws that differ from 1,000 customers, on 26% at 250 and 47% at 500; it made money on 25 of the 139 draws on which it acted. The per-customer optimiser wins 58% of draws, CI [0.42, 0.72], which is chance. The holdout estimator is unbiased (88–98% interval coverage), but detecting the delivered lift of 0.0108 at 80% power needs about 119,500 customers with a 10% holdout (make holdout).</a:t>
             </a:r>
             <a:endParaRPr lang="en-US" dirty="0"/>
           </a:p>
@@ -7564,7 +7564,7 @@
                 <a:ea typeface="Calibri" pitchFamily="34" charset="-122"/>
                 <a:cs typeface="Calibri" pitchFamily="34" charset="-120"/>
               </a:rPr>
-              <a:t>pytest (721 tests) · ruff · GitHub Actions CI · headless Chrome and pandoc for reports</a:t>
+              <a:t>pytest (750 tests) · ruff · GitHub Actions CI · headless Chrome and pandoc for reports</a:t>
             </a:r>
             <a:endParaRPr lang="en-US" sz="1150" dirty="0"/>
           </a:p>
@@ -12929,9 +12929,10 @@
             <a:tbl>
               <a:tblPr/>
               <a:tblGrid>
-                <a:gridCol w="1737360"/>
-                <a:gridCol w="1508760"/>
-                <a:gridCol w="1508760"/>
+                <a:gridCol w="1645920"/>
+                <a:gridCol w="1298448"/>
+                <a:gridCol w="530352"/>
+                <a:gridCol w="1280160"/>
               </a:tblGrid>
               <a:tr h="347472">
                 <a:tc>
@@ -12943,7 +12944,7 @@
                         <a:buNone/>
                       </a:pPr>
                       <a:r>
-                        <a:rPr lang="en-US" sz="1000" b="1" dirty="0">
+                        <a:rPr lang="en-US" sz="950" b="1" dirty="0">
                           <a:solidFill>
                             <a:srgbClr val="FFFFFF"/>
                           </a:solidFill>
@@ -12953,14 +12954,14 @@
                         </a:rPr>
                         <a:t>Setting</a:t>
                       </a:r>
-                      <a:endParaRPr lang="en-US" sz="1000" dirty="0">
+                      <a:endParaRPr lang="en-US" sz="950" dirty="0">
                         <a:latin typeface="Calibri" charset="0"/>
                         <a:ea typeface="Calibri" charset="0"/>
                         <a:cs typeface="Calibri" charset="0"/>
                       </a:endParaRPr>
                     </a:p>
                   </a:txBody>
-                  <a:tcPr marL="50800" marR="50800" marT="25400" marB="25400" anchor="ctr">
+                  <a:tcPr marL="38100" marR="38100" marT="25400" marB="25400" anchor="ctr">
                     <a:lnL w="6350" cap="flat" cmpd="sng" algn="ctr">
                       <a:solidFill>
                         <a:srgbClr val="D5DDE5"/>
@@ -13011,7 +13012,7 @@
                         <a:buNone/>
                       </a:pPr>
                       <a:r>
-                        <a:rPr lang="en-US" sz="1000" b="1" dirty="0">
+                        <a:rPr lang="en-US" sz="950" b="1" dirty="0">
                           <a:solidFill>
                             <a:srgbClr val="FFFFFF"/>
                           </a:solidFill>
@@ -13021,14 +13022,14 @@
                         </a:rPr>
                         <a:t>corr(τ, π)</a:t>
                       </a:r>
-                      <a:endParaRPr lang="en-US" sz="1000" dirty="0">
+                      <a:endParaRPr lang="en-US" sz="950" dirty="0">
                         <a:latin typeface="Calibri" charset="0"/>
                         <a:ea typeface="Calibri" charset="0"/>
                         <a:cs typeface="Calibri" charset="0"/>
                       </a:endParaRPr>
                     </a:p>
                   </a:txBody>
-                  <a:tcPr marL="50800" marR="50800" marT="25400" marB="25400" anchor="ctr">
+                  <a:tcPr marL="38100" marR="38100" marT="25400" marB="25400" anchor="ctr">
                     <a:lnL w="6350" cap="flat" cmpd="sng" algn="ctr">
                       <a:solidFill>
                         <a:srgbClr val="D5DDE5"/>
@@ -13079,7 +13080,7 @@
                         <a:buNone/>
                       </a:pPr>
                       <a:r>
-                        <a:rPr lang="en-US" sz="1000" b="1" dirty="0">
+                        <a:rPr lang="en-US" sz="950" b="1" dirty="0">
                           <a:solidFill>
                             <a:srgbClr val="FFFFFF"/>
                           </a:solidFill>
@@ -13087,16 +13088,84 @@
                           <a:ea typeface="Calibri" pitchFamily="34" charset="-122"/>
                           <a:cs typeface="Calibri" pitchFamily="34" charset="-120"/>
                         </a:rPr>
-                        <a:t>Uplift gain per 1,000</a:t>
+                        <a:t>indep.</a:t>
                       </a:r>
-                      <a:endParaRPr lang="en-US" sz="1000" dirty="0">
+                      <a:endParaRPr lang="en-US" sz="950" dirty="0">
                         <a:latin typeface="Calibri" charset="0"/>
                         <a:ea typeface="Calibri" charset="0"/>
                         <a:cs typeface="Calibri" charset="0"/>
                       </a:endParaRPr>
                     </a:p>
                   </a:txBody>
-                  <a:tcPr marL="50800" marR="50800" marT="25400" marB="25400" anchor="ctr">
+                  <a:tcPr marL="38100" marR="38100" marT="25400" marB="25400" anchor="ctr">
+                    <a:lnL w="6350" cap="flat" cmpd="sng" algn="ctr">
+                      <a:solidFill>
+                        <a:srgbClr val="D5DDE5"/>
+                      </a:solidFill>
+                      <a:prstDash val="solid"/>
+                      <a:round/>
+                      <a:headEnd type="none" w="med" len="med"/>
+                      <a:tailEnd type="none" w="med" len="med"/>
+                    </a:lnL>
+                    <a:lnR w="6350" cap="flat" cmpd="sng" algn="ctr">
+                      <a:solidFill>
+                        <a:srgbClr val="D5DDE5"/>
+                      </a:solidFill>
+                      <a:prstDash val="solid"/>
+                      <a:round/>
+                      <a:headEnd type="none" w="med" len="med"/>
+                      <a:tailEnd type="none" w="med" len="med"/>
+                    </a:lnR>
+                    <a:lnT w="6350" cap="flat" cmpd="sng" algn="ctr">
+                      <a:solidFill>
+                        <a:srgbClr val="D5DDE5"/>
+                      </a:solidFill>
+                      <a:prstDash val="solid"/>
+                      <a:round/>
+                      <a:headEnd type="none" w="med" len="med"/>
+                      <a:tailEnd type="none" w="med" len="med"/>
+                    </a:lnT>
+                    <a:lnB w="6350" cap="flat" cmpd="sng" algn="ctr">
+                      <a:solidFill>
+                        <a:srgbClr val="D5DDE5"/>
+                      </a:solidFill>
+                      <a:prstDash val="solid"/>
+                      <a:round/>
+                      <a:headEnd type="none" w="med" len="med"/>
+                      <a:tailEnd type="none" w="med" len="med"/>
+                    </a:lnB>
+                    <a:solidFill>
+                      <a:srgbClr val="12263A"/>
+                    </a:solidFill>
+                  </a:tcPr>
+                </a:tc>
+                <a:tc>
+                  <a:txBody>
+                    <a:bodyPr/>
+                    <a:lstStyle/>
+                    <a:p>
+                      <a:pPr indent="0" marL="0">
+                        <a:buNone/>
+                      </a:pPr>
+                      <a:r>
+                        <a:rPr lang="en-US" sz="950" b="1" dirty="0">
+                          <a:solidFill>
+                            <a:srgbClr val="FFFFFF"/>
+                          </a:solidFill>
+                          <a:latin typeface="Calibri" pitchFamily="34" charset="0"/>
+                          <a:ea typeface="Calibri" pitchFamily="34" charset="-122"/>
+                          <a:cs typeface="Calibri" pitchFamily="34" charset="-120"/>
+                        </a:rPr>
+                        <a:t>Uplift gain / 1,000</a:t>
+                      </a:r>
+                      <a:endParaRPr lang="en-US" sz="950" dirty="0">
+                        <a:latin typeface="Calibri" charset="0"/>
+                        <a:ea typeface="Calibri" charset="0"/>
+                        <a:cs typeface="Calibri" charset="0"/>
+                      </a:endParaRPr>
+                    </a:p>
+                  </a:txBody>
+                  <a:tcPr marL="38100" marR="38100" marT="25400" marB="25400" anchor="ctr">
                     <a:lnL w="6350" cap="flat" cmpd="sng" algn="ctr">
                       <a:solidFill>
                         <a:srgbClr val="D5DDE5"/>
@@ -13149,7 +13218,7 @@
                         <a:buNone/>
                       </a:pPr>
                       <a:r>
-                        <a:rPr lang="en-US" sz="1000" dirty="0">
+                        <a:rPr lang="en-US" sz="950" dirty="0">
                           <a:solidFill>
                             <a:srgbClr val="1B2733"/>
                           </a:solidFill>
@@ -13159,14 +13228,14 @@
                         </a:rPr>
                         <a:t>Criteo · advertising</a:t>
                       </a:r>
-                      <a:endParaRPr lang="en-US" sz="1000" dirty="0">
+                      <a:endParaRPr lang="en-US" sz="950" dirty="0">
                         <a:latin typeface="Calibri" charset="0"/>
                         <a:ea typeface="Calibri" charset="0"/>
                         <a:cs typeface="Calibri" charset="0"/>
                       </a:endParaRPr>
                     </a:p>
                   </a:txBody>
-                  <a:tcPr marL="50800" marR="50800" marT="25400" marB="25400" anchor="ctr">
+                  <a:tcPr marL="38100" marR="38100" marT="25400" marB="25400" anchor="ctr">
                     <a:lnL w="6350" cap="flat" cmpd="sng" algn="ctr">
                       <a:solidFill>
                         <a:srgbClr val="D5DDE5"/>
@@ -13217,7 +13286,7 @@
                         <a:buNone/>
                       </a:pPr>
                       <a:r>
-                        <a:rPr lang="en-US" sz="1000" dirty="0">
+                        <a:rPr lang="en-US" sz="950" dirty="0">
                           <a:solidFill>
                             <a:srgbClr val="1B2733"/>
                           </a:solidFill>
@@ -13227,14 +13296,14 @@
                         </a:rPr>
                         <a:t>+0.58 [+0.51, +0.65]</a:t>
                       </a:r>
-                      <a:endParaRPr lang="en-US" sz="1000" dirty="0">
+                      <a:endParaRPr lang="en-US" sz="950" dirty="0">
                         <a:latin typeface="Calibri" charset="0"/>
                         <a:ea typeface="Calibri" charset="0"/>
                         <a:cs typeface="Calibri" charset="0"/>
                       </a:endParaRPr>
                     </a:p>
                   </a:txBody>
-                  <a:tcPr marL="50800" marR="50800" marT="25400" marB="25400" anchor="ctr">
+                  <a:tcPr marL="38100" marR="38100" marT="25400" marB="25400" anchor="ctr">
                     <a:lnL w="6350" cap="flat" cmpd="sng" algn="ctr">
                       <a:solidFill>
                         <a:srgbClr val="D5DDE5"/>
@@ -13285,7 +13354,75 @@
                         <a:buNone/>
                       </a:pPr>
                       <a:r>
-                        <a:rPr lang="en-US" sz="1000" dirty="0">
+                        <a:rPr lang="en-US" sz="950" dirty="0">
+                          <a:solidFill>
+                            <a:srgbClr val="1B2733"/>
+                          </a:solidFill>
+                          <a:latin typeface="Calibri" pitchFamily="34" charset="0"/>
+                          <a:ea typeface="Calibri" pitchFamily="34" charset="-122"/>
+                          <a:cs typeface="Calibri" pitchFamily="34" charset="-120"/>
+                        </a:rPr>
+                        <a:t>+0.56</a:t>
+                      </a:r>
+                      <a:endParaRPr lang="en-US" sz="950" dirty="0">
+                        <a:latin typeface="Calibri" charset="0"/>
+                        <a:ea typeface="Calibri" charset="0"/>
+                        <a:cs typeface="Calibri" charset="0"/>
+                      </a:endParaRPr>
+                    </a:p>
+                  </a:txBody>
+                  <a:tcPr marL="38100" marR="38100" marT="25400" marB="25400" anchor="ctr">
+                    <a:lnL w="6350" cap="flat" cmpd="sng" algn="ctr">
+                      <a:solidFill>
+                        <a:srgbClr val="D5DDE5"/>
+                      </a:solidFill>
+                      <a:prstDash val="solid"/>
+                      <a:round/>
+                      <a:headEnd type="none" w="med" len="med"/>
+                      <a:tailEnd type="none" w="med" len="med"/>
+                    </a:lnL>
+                    <a:lnR w="6350" cap="flat" cmpd="sng" algn="ctr">
+                      <a:solidFill>
+                        <a:srgbClr val="D5DDE5"/>
+                      </a:solidFill>
+                      <a:prstDash val="solid"/>
+                      <a:round/>
+                      <a:headEnd type="none" w="med" len="med"/>
+                      <a:tailEnd type="none" w="med" len="med"/>
+                    </a:lnR>
+                    <a:lnT w="6350" cap="flat" cmpd="sng" algn="ctr">
+                      <a:solidFill>
+                        <a:srgbClr val="D5DDE5"/>
+                      </a:solidFill>
+                      <a:prstDash val="solid"/>
+                      <a:round/>
+                      <a:headEnd type="none" w="med" len="med"/>
+                      <a:tailEnd type="none" w="med" len="med"/>
+                    </a:lnT>
+                    <a:lnB w="6350" cap="flat" cmpd="sng" algn="ctr">
+                      <a:solidFill>
+                        <a:srgbClr val="D5DDE5"/>
+                      </a:solidFill>
+                      <a:prstDash val="solid"/>
+                      <a:round/>
+                      <a:headEnd type="none" w="med" len="med"/>
+                      <a:tailEnd type="none" w="med" len="med"/>
+                    </a:lnB>
+                    <a:solidFill>
+                      <a:srgbClr val="FFFFFF"/>
+                    </a:solidFill>
+                  </a:tcPr>
+                </a:tc>
+                <a:tc>
+                  <a:txBody>
+                    <a:bodyPr/>
+                    <a:lstStyle/>
+                    <a:p>
+                      <a:pPr algn="ctr" indent="0" marL="0">
+                        <a:buNone/>
+                      </a:pPr>
+                      <a:r>
+                        <a:rPr lang="en-US" sz="950" dirty="0">
                           <a:solidFill>
                             <a:srgbClr val="1B2733"/>
                           </a:solidFill>
@@ -13295,14 +13432,14 @@
                         </a:rPr>
                         <a:t>+0.1 [−0.1, +0.3]</a:t>
                       </a:r>
-                      <a:endParaRPr lang="en-US" sz="1000" dirty="0">
+                      <a:endParaRPr lang="en-US" sz="950" dirty="0">
                         <a:latin typeface="Calibri" charset="0"/>
                         <a:ea typeface="Calibri" charset="0"/>
                         <a:cs typeface="Calibri" charset="0"/>
                       </a:endParaRPr>
                     </a:p>
                   </a:txBody>
-                  <a:tcPr marL="50800" marR="50800" marT="25400" marB="25400" anchor="ctr">
+                  <a:tcPr marL="38100" marR="38100" marT="25400" marB="25400" anchor="ctr">
                     <a:lnL w="6350" cap="flat" cmpd="sng" algn="ctr">
                       <a:solidFill>
                         <a:srgbClr val="D5DDE5"/>
@@ -13355,7 +13492,7 @@
                         <a:buNone/>
                       </a:pPr>
                       <a:r>
-                        <a:rPr lang="en-US" sz="1000" dirty="0">
+                        <a:rPr lang="en-US" sz="950" dirty="0">
                           <a:solidFill>
                             <a:srgbClr val="1B2733"/>
                           </a:solidFill>
@@ -13363,16 +13500,16 @@
                           <a:ea typeface="Calibri" pitchFamily="34" charset="-122"/>
                           <a:cs typeface="Calibri" pitchFamily="34" charset="-120"/>
                         </a:rPr>
-                        <a:t>Hillstrom · men's e-mail</a:t>
+                        <a:t>Hillstrom · men's e-mail †</a:t>
                       </a:r>
-                      <a:endParaRPr lang="en-US" sz="1000" dirty="0">
+                      <a:endParaRPr lang="en-US" sz="950" dirty="0">
                         <a:latin typeface="Calibri" charset="0"/>
                         <a:ea typeface="Calibri" charset="0"/>
                         <a:cs typeface="Calibri" charset="0"/>
                       </a:endParaRPr>
                     </a:p>
                   </a:txBody>
-                  <a:tcPr marL="50800" marR="50800" marT="25400" marB="25400" anchor="ctr">
+                  <a:tcPr marL="38100" marR="38100" marT="25400" marB="25400" anchor="ctr">
                     <a:lnL w="6350" cap="flat" cmpd="sng" algn="ctr">
                       <a:solidFill>
                         <a:srgbClr val="D5DDE5"/>
@@ -13423,7 +13560,7 @@
                         <a:buNone/>
                       </a:pPr>
                       <a:r>
-                        <a:rPr lang="en-US" sz="1000" dirty="0">
+                        <a:rPr lang="en-US" sz="950" dirty="0">
                           <a:solidFill>
                             <a:srgbClr val="1B2733"/>
                           </a:solidFill>
@@ -13433,14 +13570,14 @@
                         </a:rPr>
                         <a:t>+0.28 [−0.21, +0.66]</a:t>
                       </a:r>
-                      <a:endParaRPr lang="en-US" sz="1000" dirty="0">
+                      <a:endParaRPr lang="en-US" sz="950" dirty="0">
                         <a:latin typeface="Calibri" charset="0"/>
                         <a:ea typeface="Calibri" charset="0"/>
                         <a:cs typeface="Calibri" charset="0"/>
                       </a:endParaRPr>
                     </a:p>
                   </a:txBody>
-                  <a:tcPr marL="50800" marR="50800" marT="25400" marB="25400" anchor="ctr">
+                  <a:tcPr marL="38100" marR="38100" marT="25400" marB="25400" anchor="ctr">
                     <a:lnL w="6350" cap="flat" cmpd="sng" algn="ctr">
                       <a:solidFill>
                         <a:srgbClr val="D5DDE5"/>
@@ -13491,7 +13628,75 @@
                         <a:buNone/>
                       </a:pPr>
                       <a:r>
-                        <a:rPr lang="en-US" sz="1000" dirty="0">
+                        <a:rPr lang="en-US" sz="950" dirty="0">
+                          <a:solidFill>
+                            <a:srgbClr val="1B2733"/>
+                          </a:solidFill>
+                          <a:latin typeface="Calibri" pitchFamily="34" charset="0"/>
+                          <a:ea typeface="Calibri" pitchFamily="34" charset="-122"/>
+                          <a:cs typeface="Calibri" pitchFamily="34" charset="-120"/>
+                        </a:rPr>
+                        <a:t>+0.19</a:t>
+                      </a:r>
+                      <a:endParaRPr lang="en-US" sz="950" dirty="0">
+                        <a:latin typeface="Calibri" charset="0"/>
+                        <a:ea typeface="Calibri" charset="0"/>
+                        <a:cs typeface="Calibri" charset="0"/>
+                      </a:endParaRPr>
+                    </a:p>
+                  </a:txBody>
+                  <a:tcPr marL="38100" marR="38100" marT="25400" marB="25400" anchor="ctr">
+                    <a:lnL w="6350" cap="flat" cmpd="sng" algn="ctr">
+                      <a:solidFill>
+                        <a:srgbClr val="D5DDE5"/>
+                      </a:solidFill>
+                      <a:prstDash val="solid"/>
+                      <a:round/>
+                      <a:headEnd type="none" w="med" len="med"/>
+                      <a:tailEnd type="none" w="med" len="med"/>
+                    </a:lnL>
+                    <a:lnR w="6350" cap="flat" cmpd="sng" algn="ctr">
+                      <a:solidFill>
+                        <a:srgbClr val="D5DDE5"/>
+                      </a:solidFill>
+                      <a:prstDash val="solid"/>
+                      <a:round/>
+                      <a:headEnd type="none" w="med" len="med"/>
+                      <a:tailEnd type="none" w="med" len="med"/>
+                    </a:lnR>
+                    <a:lnT w="6350" cap="flat" cmpd="sng" algn="ctr">
+                      <a:solidFill>
+                        <a:srgbClr val="D5DDE5"/>
+                      </a:solidFill>
+                      <a:prstDash val="solid"/>
+                      <a:round/>
+                      <a:headEnd type="none" w="med" len="med"/>
+                      <a:tailEnd type="none" w="med" len="med"/>
+                    </a:lnT>
+                    <a:lnB w="6350" cap="flat" cmpd="sng" algn="ctr">
+                      <a:solidFill>
+                        <a:srgbClr val="D5DDE5"/>
+                      </a:solidFill>
+                      <a:prstDash val="solid"/>
+                      <a:round/>
+                      <a:headEnd type="none" w="med" len="med"/>
+                      <a:tailEnd type="none" w="med" len="med"/>
+                    </a:lnB>
+                    <a:solidFill>
+                      <a:srgbClr val="F2F5F8"/>
+                    </a:solidFill>
+                  </a:tcPr>
+                </a:tc>
+                <a:tc>
+                  <a:txBody>
+                    <a:bodyPr/>
+                    <a:lstStyle/>
+                    <a:p>
+                      <a:pPr algn="ctr" indent="0" marL="0">
+                        <a:buNone/>
+                      </a:pPr>
+                      <a:r>
+                        <a:rPr lang="en-US" sz="950" dirty="0">
                           <a:solidFill>
                             <a:srgbClr val="1B2733"/>
                           </a:solidFill>
@@ -13501,14 +13706,14 @@
                         </a:rPr>
                         <a:t>−0.1 [−3.0, +2.8]</a:t>
                       </a:r>
-                      <a:endParaRPr lang="en-US" sz="1000" dirty="0">
+                      <a:endParaRPr lang="en-US" sz="950" dirty="0">
                         <a:latin typeface="Calibri" charset="0"/>
                         <a:ea typeface="Calibri" charset="0"/>
                         <a:cs typeface="Calibri" charset="0"/>
                       </a:endParaRPr>
                     </a:p>
                   </a:txBody>
-                  <a:tcPr marL="50800" marR="50800" marT="25400" marB="25400" anchor="ctr">
+                  <a:tcPr marL="38100" marR="38100" marT="25400" marB="25400" anchor="ctr">
                     <a:lnL w="6350" cap="flat" cmpd="sng" algn="ctr">
                       <a:solidFill>
                         <a:srgbClr val="D5DDE5"/>
@@ -13561,7 +13766,7 @@
                         <a:buNone/>
                       </a:pPr>
                       <a:r>
-                        <a:rPr lang="en-US" sz="1000" dirty="0">
+                        <a:rPr lang="en-US" sz="950" dirty="0">
                           <a:solidFill>
                             <a:srgbClr val="1B2733"/>
                           </a:solidFill>
@@ -13569,16 +13774,16 @@
                           <a:ea typeface="Calibri" pitchFamily="34" charset="-122"/>
                           <a:cs typeface="Calibri" pitchFamily="34" charset="-120"/>
                         </a:rPr>
-                        <a:t>Hillstrom · women's e-mail</a:t>
+                        <a:t>Hillstrom · women's e-mail †</a:t>
                       </a:r>
-                      <a:endParaRPr lang="en-US" sz="1000" dirty="0">
+                      <a:endParaRPr lang="en-US" sz="950" dirty="0">
                         <a:latin typeface="Calibri" charset="0"/>
                         <a:ea typeface="Calibri" charset="0"/>
                         <a:cs typeface="Calibri" charset="0"/>
                       </a:endParaRPr>
                     </a:p>
                   </a:txBody>
-                  <a:tcPr marL="50800" marR="50800" marT="25400" marB="25400" anchor="ctr">
+                  <a:tcPr marL="38100" marR="38100" marT="25400" marB="25400" anchor="ctr">
                     <a:lnL w="6350" cap="flat" cmpd="sng" algn="ctr">
                       <a:solidFill>
                         <a:srgbClr val="D5DDE5"/>
@@ -13629,7 +13834,7 @@
                         <a:buNone/>
                       </a:pPr>
                       <a:r>
-                        <a:rPr lang="en-US" sz="1000" dirty="0">
+                        <a:rPr lang="en-US" sz="950" dirty="0">
                           <a:solidFill>
                             <a:srgbClr val="1B2733"/>
                           </a:solidFill>
@@ -13639,14 +13844,14 @@
                         </a:rPr>
                         <a:t>+0.18 [−0.07, +0.49]</a:t>
                       </a:r>
-                      <a:endParaRPr lang="en-US" sz="1000" dirty="0">
+                      <a:endParaRPr lang="en-US" sz="950" dirty="0">
                         <a:latin typeface="Calibri" charset="0"/>
                         <a:ea typeface="Calibri" charset="0"/>
                         <a:cs typeface="Calibri" charset="0"/>
                       </a:endParaRPr>
                     </a:p>
                   </a:txBody>
-                  <a:tcPr marL="50800" marR="50800" marT="25400" marB="25400" anchor="ctr">
+                  <a:tcPr marL="38100" marR="38100" marT="25400" marB="25400" anchor="ctr">
                     <a:lnL w="6350" cap="flat" cmpd="sng" algn="ctr">
                       <a:solidFill>
                         <a:srgbClr val="D5DDE5"/>
@@ -13697,7 +13902,75 @@
                         <a:buNone/>
                       </a:pPr>
                       <a:r>
-                        <a:rPr lang="en-US" sz="1000" dirty="0">
+                        <a:rPr lang="en-US" sz="950" dirty="0">
+                          <a:solidFill>
+                            <a:srgbClr val="1B2733"/>
+                          </a:solidFill>
+                          <a:latin typeface="Calibri" pitchFamily="34" charset="0"/>
+                          <a:ea typeface="Calibri" pitchFamily="34" charset="-122"/>
+                          <a:cs typeface="Calibri" pitchFamily="34" charset="-120"/>
+                        </a:rPr>
+                        <a:t>+0.11</a:t>
+                      </a:r>
+                      <a:endParaRPr lang="en-US" sz="950" dirty="0">
+                        <a:latin typeface="Calibri" charset="0"/>
+                        <a:ea typeface="Calibri" charset="0"/>
+                        <a:cs typeface="Calibri" charset="0"/>
+                      </a:endParaRPr>
+                    </a:p>
+                  </a:txBody>
+                  <a:tcPr marL="38100" marR="38100" marT="25400" marB="25400" anchor="ctr">
+                    <a:lnL w="6350" cap="flat" cmpd="sng" algn="ctr">
+                      <a:solidFill>
+                        <a:srgbClr val="D5DDE5"/>
+                      </a:solidFill>
+                      <a:prstDash val="solid"/>
+                      <a:round/>
+                      <a:headEnd type="none" w="med" len="med"/>
+                      <a:tailEnd type="none" w="med" len="med"/>
+                    </a:lnL>
+                    <a:lnR w="6350" cap="flat" cmpd="sng" algn="ctr">
+                      <a:solidFill>
+                        <a:srgbClr val="D5DDE5"/>
+                      </a:solidFill>
+                      <a:prstDash val="solid"/>
+                      <a:round/>
+                      <a:headEnd type="none" w="med" len="med"/>
+                      <a:tailEnd type="none" w="med" len="med"/>
+                    </a:lnR>
+                    <a:lnT w="6350" cap="flat" cmpd="sng" algn="ctr">
+                      <a:solidFill>
+                        <a:srgbClr val="D5DDE5"/>
+                      </a:solidFill>
+                      <a:prstDash val="solid"/>
+                      <a:round/>
+                      <a:headEnd type="none" w="med" len="med"/>
+                      <a:tailEnd type="none" w="med" len="med"/>
+                    </a:lnT>
+                    <a:lnB w="6350" cap="flat" cmpd="sng" algn="ctr">
+                      <a:solidFill>
+                        <a:srgbClr val="D5DDE5"/>
+                      </a:solidFill>
+                      <a:prstDash val="solid"/>
+                      <a:round/>
+                      <a:headEnd type="none" w="med" len="med"/>
+                      <a:tailEnd type="none" w="med" len="med"/>
+                    </a:lnB>
+                    <a:solidFill>
+                      <a:srgbClr val="FFFFFF"/>
+                    </a:solidFill>
+                  </a:tcPr>
+                </a:tc>
+                <a:tc>
+                  <a:txBody>
+                    <a:bodyPr/>
+                    <a:lstStyle/>
+                    <a:p>
+                      <a:pPr algn="ctr" indent="0" marL="0">
+                        <a:buNone/>
+                      </a:pPr>
+                      <a:r>
+                        <a:rPr lang="en-US" sz="950" dirty="0">
                           <a:solidFill>
                             <a:srgbClr val="1B2733"/>
                           </a:solidFill>
@@ -13707,14 +13980,14 @@
                         </a:rPr>
                         <a:t>+2.6 [−1.9, +6.2]</a:t>
                       </a:r>
-                      <a:endParaRPr lang="en-US" sz="1000" dirty="0">
+                      <a:endParaRPr lang="en-US" sz="950" dirty="0">
                         <a:latin typeface="Calibri" charset="0"/>
                         <a:ea typeface="Calibri" charset="0"/>
                         <a:cs typeface="Calibri" charset="0"/>
                       </a:endParaRPr>
                     </a:p>
                   </a:txBody>
-                  <a:tcPr marL="50800" marR="50800" marT="25400" marB="25400" anchor="ctr">
+                  <a:tcPr marL="38100" marR="38100" marT="25400" marB="25400" anchor="ctr">
                     <a:lnL w="6350" cap="flat" cmpd="sng" algn="ctr">
                       <a:solidFill>
                         <a:srgbClr val="D5DDE5"/>
@@ -13767,7 +14040,7 @@
                         <a:buNone/>
                       </a:pPr>
                       <a:r>
-                        <a:rPr lang="en-US" sz="1000" dirty="0">
+                        <a:rPr lang="en-US" sz="950" dirty="0">
                           <a:solidFill>
                             <a:srgbClr val="1B2733"/>
                           </a:solidFill>
@@ -13777,14 +14050,14 @@
                         </a:rPr>
                         <a:t>Lenta · retail promotion</a:t>
                       </a:r>
-                      <a:endParaRPr lang="en-US" sz="1000" dirty="0">
+                      <a:endParaRPr lang="en-US" sz="950" dirty="0">
                         <a:latin typeface="Calibri" charset="0"/>
                         <a:ea typeface="Calibri" charset="0"/>
                         <a:cs typeface="Calibri" charset="0"/>
                       </a:endParaRPr>
                     </a:p>
                   </a:txBody>
-                  <a:tcPr marL="50800" marR="50800" marT="25400" marB="25400" anchor="ctr">
+                  <a:tcPr marL="38100" marR="38100" marT="25400" marB="25400" anchor="ctr">
                     <a:lnL w="6350" cap="flat" cmpd="sng" algn="ctr">
                       <a:solidFill>
                         <a:srgbClr val="D5DDE5"/>
@@ -13835,7 +14108,7 @@
                         <a:buNone/>
                       </a:pPr>
                       <a:r>
-                        <a:rPr lang="en-US" sz="1000" dirty="0">
+                        <a:rPr lang="en-US" sz="950" dirty="0">
                           <a:solidFill>
                             <a:srgbClr val="1B2733"/>
                           </a:solidFill>
@@ -13845,14 +14118,14 @@
                         </a:rPr>
                         <a:t>+0.13 [+0.05, +0.22]</a:t>
                       </a:r>
-                      <a:endParaRPr lang="en-US" sz="1000" dirty="0">
+                      <a:endParaRPr lang="en-US" sz="950" dirty="0">
                         <a:latin typeface="Calibri" charset="0"/>
                         <a:ea typeface="Calibri" charset="0"/>
                         <a:cs typeface="Calibri" charset="0"/>
                       </a:endParaRPr>
                     </a:p>
                   </a:txBody>
-                  <a:tcPr marL="50800" marR="50800" marT="25400" marB="25400" anchor="ctr">
+                  <a:tcPr marL="38100" marR="38100" marT="25400" marB="25400" anchor="ctr">
                     <a:lnL w="6350" cap="flat" cmpd="sng" algn="ctr">
                       <a:solidFill>
                         <a:srgbClr val="D5DDE5"/>
@@ -13903,7 +14176,75 @@
                         <a:buNone/>
                       </a:pPr>
                       <a:r>
-                        <a:rPr lang="en-US" sz="1000" dirty="0">
+                        <a:rPr lang="en-US" sz="950" dirty="0">
+                          <a:solidFill>
+                            <a:srgbClr val="1B2733"/>
+                          </a:solidFill>
+                          <a:latin typeface="Calibri" pitchFamily="34" charset="0"/>
+                          <a:ea typeface="Calibri" pitchFamily="34" charset="-122"/>
+                          <a:cs typeface="Calibri" pitchFamily="34" charset="-120"/>
+                        </a:rPr>
+                        <a:t>+0.13</a:t>
+                      </a:r>
+                      <a:endParaRPr lang="en-US" sz="950" dirty="0">
+                        <a:latin typeface="Calibri" charset="0"/>
+                        <a:ea typeface="Calibri" charset="0"/>
+                        <a:cs typeface="Calibri" charset="0"/>
+                      </a:endParaRPr>
+                    </a:p>
+                  </a:txBody>
+                  <a:tcPr marL="38100" marR="38100" marT="25400" marB="25400" anchor="ctr">
+                    <a:lnL w="6350" cap="flat" cmpd="sng" algn="ctr">
+                      <a:solidFill>
+                        <a:srgbClr val="D5DDE5"/>
+                      </a:solidFill>
+                      <a:prstDash val="solid"/>
+                      <a:round/>
+                      <a:headEnd type="none" w="med" len="med"/>
+                      <a:tailEnd type="none" w="med" len="med"/>
+                    </a:lnL>
+                    <a:lnR w="6350" cap="flat" cmpd="sng" algn="ctr">
+                      <a:solidFill>
+                        <a:srgbClr val="D5DDE5"/>
+                      </a:solidFill>
+                      <a:prstDash val="solid"/>
+                      <a:round/>
+                      <a:headEnd type="none" w="med" len="med"/>
+                      <a:tailEnd type="none" w="med" len="med"/>
+                    </a:lnR>
+                    <a:lnT w="6350" cap="flat" cmpd="sng" algn="ctr">
+                      <a:solidFill>
+                        <a:srgbClr val="D5DDE5"/>
+                      </a:solidFill>
+                      <a:prstDash val="solid"/>
+                      <a:round/>
+                      <a:headEnd type="none" w="med" len="med"/>
+                      <a:tailEnd type="none" w="med" len="med"/>
+                    </a:lnT>
+                    <a:lnB w="6350" cap="flat" cmpd="sng" algn="ctr">
+                      <a:solidFill>
+                        <a:srgbClr val="D5DDE5"/>
+                      </a:solidFill>
+                      <a:prstDash val="solid"/>
+                      <a:round/>
+                      <a:headEnd type="none" w="med" len="med"/>
+                      <a:tailEnd type="none" w="med" len="med"/>
+                    </a:lnB>
+                    <a:solidFill>
+                      <a:srgbClr val="F2F5F8"/>
+                    </a:solidFill>
+                  </a:tcPr>
+                </a:tc>
+                <a:tc>
+                  <a:txBody>
+                    <a:bodyPr/>
+                    <a:lstStyle/>
+                    <a:p>
+                      <a:pPr algn="ctr" indent="0" marL="0">
+                        <a:buNone/>
+                      </a:pPr>
+                      <a:r>
+                        <a:rPr lang="en-US" sz="950" dirty="0">
                           <a:solidFill>
                             <a:srgbClr val="1B2733"/>
                           </a:solidFill>
@@ -13913,14 +14254,14 @@
                         </a:rPr>
                         <a:t>+0.6 [−0.1, +1.5]</a:t>
                       </a:r>
-                      <a:endParaRPr lang="en-US" sz="1000" dirty="0">
+                      <a:endParaRPr lang="en-US" sz="950" dirty="0">
                         <a:latin typeface="Calibri" charset="0"/>
                         <a:ea typeface="Calibri" charset="0"/>
                         <a:cs typeface="Calibri" charset="0"/>
                       </a:endParaRPr>
                     </a:p>
                   </a:txBody>
-                  <a:tcPr marL="50800" marR="50800" marT="25400" marB="25400" anchor="ctr">
+                  <a:tcPr marL="38100" marR="38100" marT="25400" marB="25400" anchor="ctr">
                     <a:lnL w="6350" cap="flat" cmpd="sng" algn="ctr">
                       <a:solidFill>
                         <a:srgbClr val="D5DDE5"/>
@@ -13973,7 +14314,7 @@
                         <a:buNone/>
                       </a:pPr>
                       <a:r>
-                        <a:rPr lang="en-US" sz="1000" i="1" dirty="0">
+                        <a:rPr lang="en-US" sz="950" i="1" dirty="0">
                           <a:solidFill>
                             <a:srgbClr val="1B2733"/>
                           </a:solidFill>
@@ -13983,14 +14324,14 @@
                         </a:rPr>
                         <a:t>SubSim · simulated trial*</a:t>
                       </a:r>
-                      <a:endParaRPr lang="en-US" sz="1000" dirty="0">
+                      <a:endParaRPr lang="en-US" sz="950" dirty="0">
                         <a:latin typeface="Calibri" charset="0"/>
                         <a:ea typeface="Calibri" charset="0"/>
                         <a:cs typeface="Calibri" charset="0"/>
                       </a:endParaRPr>
                     </a:p>
                   </a:txBody>
-                  <a:tcPr marL="50800" marR="50800" marT="25400" marB="25400" anchor="ctr">
+                  <a:tcPr marL="38100" marR="38100" marT="25400" marB="25400" anchor="ctr">
                     <a:lnL w="6350" cap="flat" cmpd="sng" algn="ctr">
                       <a:solidFill>
                         <a:srgbClr val="D5DDE5"/>
@@ -14041,7 +14382,7 @@
                         <a:buNone/>
                       </a:pPr>
                       <a:r>
-                        <a:rPr lang="en-US" sz="1000" i="1" dirty="0">
+                        <a:rPr lang="en-US" sz="950" i="1" dirty="0">
                           <a:solidFill>
                             <a:srgbClr val="1B2733"/>
                           </a:solidFill>
@@ -14051,14 +14392,14 @@
                         </a:rPr>
                         <a:t>−0.21 [−0.33, −0.07]</a:t>
                       </a:r>
-                      <a:endParaRPr lang="en-US" sz="1000" dirty="0">
+                      <a:endParaRPr lang="en-US" sz="950" dirty="0">
                         <a:latin typeface="Calibri" charset="0"/>
                         <a:ea typeface="Calibri" charset="0"/>
                         <a:cs typeface="Calibri" charset="0"/>
                       </a:endParaRPr>
                     </a:p>
                   </a:txBody>
-                  <a:tcPr marL="50800" marR="50800" marT="25400" marB="25400" anchor="ctr">
+                  <a:tcPr marL="38100" marR="38100" marT="25400" marB="25400" anchor="ctr">
                     <a:lnL w="6350" cap="flat" cmpd="sng" algn="ctr">
                       <a:solidFill>
                         <a:srgbClr val="D5DDE5"/>
@@ -14109,7 +14450,75 @@
                         <a:buNone/>
                       </a:pPr>
                       <a:r>
-                        <a:rPr lang="en-US" sz="1000" b="1" i="1" dirty="0">
+                        <a:rPr lang="en-US" sz="950" i="1" dirty="0">
+                          <a:solidFill>
+                            <a:srgbClr val="1B2733"/>
+                          </a:solidFill>
+                          <a:latin typeface="Calibri" pitchFamily="34" charset="0"/>
+                          <a:ea typeface="Calibri" pitchFamily="34" charset="-122"/>
+                          <a:cs typeface="Calibri" pitchFamily="34" charset="-120"/>
+                        </a:rPr>
+                        <a:t>−0.17</a:t>
+                      </a:r>
+                      <a:endParaRPr lang="en-US" sz="950" dirty="0">
+                        <a:latin typeface="Calibri" charset="0"/>
+                        <a:ea typeface="Calibri" charset="0"/>
+                        <a:cs typeface="Calibri" charset="0"/>
+                      </a:endParaRPr>
+                    </a:p>
+                  </a:txBody>
+                  <a:tcPr marL="38100" marR="38100" marT="25400" marB="25400" anchor="ctr">
+                    <a:lnL w="6350" cap="flat" cmpd="sng" algn="ctr">
+                      <a:solidFill>
+                        <a:srgbClr val="D5DDE5"/>
+                      </a:solidFill>
+                      <a:prstDash val="solid"/>
+                      <a:round/>
+                      <a:headEnd type="none" w="med" len="med"/>
+                      <a:tailEnd type="none" w="med" len="med"/>
+                    </a:lnL>
+                    <a:lnR w="6350" cap="flat" cmpd="sng" algn="ctr">
+                      <a:solidFill>
+                        <a:srgbClr val="D5DDE5"/>
+                      </a:solidFill>
+                      <a:prstDash val="solid"/>
+                      <a:round/>
+                      <a:headEnd type="none" w="med" len="med"/>
+                      <a:tailEnd type="none" w="med" len="med"/>
+                    </a:lnR>
+                    <a:lnT w="6350" cap="flat" cmpd="sng" algn="ctr">
+                      <a:solidFill>
+                        <a:srgbClr val="D5DDE5"/>
+                      </a:solidFill>
+                      <a:prstDash val="solid"/>
+                      <a:round/>
+                      <a:headEnd type="none" w="med" len="med"/>
+                      <a:tailEnd type="none" w="med" len="med"/>
+                    </a:lnT>
+                    <a:lnB w="6350" cap="flat" cmpd="sng" algn="ctr">
+                      <a:solidFill>
+                        <a:srgbClr val="D5DDE5"/>
+                      </a:solidFill>
+                      <a:prstDash val="solid"/>
+                      <a:round/>
+                      <a:headEnd type="none" w="med" len="med"/>
+                      <a:tailEnd type="none" w="med" len="med"/>
+                    </a:lnB>
+                    <a:solidFill>
+                      <a:srgbClr val="FFFFFF"/>
+                    </a:solidFill>
+                  </a:tcPr>
+                </a:tc>
+                <a:tc>
+                  <a:txBody>
+                    <a:bodyPr/>
+                    <a:lstStyle/>
+                    <a:p>
+                      <a:pPr algn="ctr" indent="0" marL="0">
+                        <a:buNone/>
+                      </a:pPr>
+                      <a:r>
+                        <a:rPr lang="en-US" sz="950" b="1" i="1" dirty="0">
                           <a:solidFill>
                             <a:srgbClr val="0B7A6B"/>
                           </a:solidFill>
@@ -14119,14 +14528,14 @@
                         </a:rPr>
                         <a:t>+9.7 [+5.0, +14.4]</a:t>
                       </a:r>
-                      <a:endParaRPr lang="en-US" sz="1000" dirty="0">
+                      <a:endParaRPr lang="en-US" sz="950" dirty="0">
                         <a:latin typeface="Calibri" charset="0"/>
                         <a:ea typeface="Calibri" charset="0"/>
                         <a:cs typeface="Calibri" charset="0"/>
                       </a:endParaRPr>
                     </a:p>
                   </a:txBody>
-                  <a:tcPr marL="50800" marR="50800" marT="25400" marB="25400" anchor="ctr">
+                  <a:tcPr marL="38100" marR="38100" marT="25400" marB="25400" anchor="ctr">
                     <a:lnL w="6350" cap="flat" cmpd="sng" algn="ctr">
                       <a:solidFill>
                         <a:srgbClr val="D5DDE5"/>
@@ -14198,7 +14607,7 @@
               <a:buNone/>
             </a:pPr>
             <a:r>
-              <a:rPr lang="en-US" sz="1050" dirty="0">
+              <a:rPr lang="en-US" sz="950" dirty="0">
                 <a:solidFill>
                   <a:srgbClr val="5F6F80"/>
                 </a:solidFill>
@@ -14206,9 +14615,9 @@
                 <a:ea typeface="Calibri" pitchFamily="34" charset="-122"/>
                 <a:cs typeface="Calibri" pitchFamily="34" charset="-120"/>
               </a:rPr>
-              <a:t>Fitted models; mean of 30 splits [2.5th–97.5th percentile]. Rows 1–4 are public experiments: no gain is clear of zero and they cannot be ordered. On the log-odds scale their correlations are −0.46 to +0.06. * 60,000 simulated customers; the negative correlation is configured.</a:t>
-            </a:r>
-            <a:endParaRPr lang="en-US" sz="1050" dirty="0"/>
+              <a:t>Fitted models; mean of 30 splits [2.5th–97.5th percentile]. Rows 1–4 are public experiments: no gain is clear of zero; on the log-odds scale their correlations are −0.46 to +0.06. indep. = risk fitted on other customers. † Range widened by the classifier's early stopping; with it off, +0.30 [+0.17, +0.42] and +0.16 [+0.04, +0.31]. * 60,000 simulated customers; the negative correlation is configured.</a:t>
+            </a:r>
+            <a:endParaRPr lang="en-US" sz="950" dirty="0"/>
           </a:p>
         </p:txBody>
       </p:sp>
@@ -15514,7 +15923,7 @@
                 <a:ea typeface="Calibri" pitchFamily="34" charset="-122"/>
                 <a:cs typeface="Calibri" pitchFamily="34" charset="-120"/>
               </a:rPr>
-              <a:t>721 automated tests</a:t>
+              <a:t>750 automated tests</a:t>
             </a:r>
             <a:endParaRPr lang="en-US" sz="1300" dirty="0"/>
           </a:p>
